--- a/skills/slide/assets/template.pptx
+++ b/skills/slide/assets/template.pptx
@@ -10,6 +10,18 @@
     <p:sldId id="258" r:id="rId4"/>
     <p:sldId id="259" r:id="rId5"/>
     <p:sldId id="260" r:id="rId6"/>
+    <p:sldId id="261" r:id="rId7"/>
+    <p:sldId id="262" r:id="rId8"/>
+    <p:sldId id="263" r:id="rId9"/>
+    <p:sldId id="264" r:id="rId10"/>
+    <p:sldId id="265" r:id="rId11"/>
+    <p:sldId id="266" r:id="rId12"/>
+    <p:sldId id="267" r:id="rId13"/>
+    <p:sldId id="268" r:id="rId14"/>
+    <p:sldId id="269" r:id="rId15"/>
+    <p:sldId id="270" r:id="rId16"/>
+    <p:sldId id="271" r:id="rId17"/>
+    <p:sldId id="272" r:id="rId18"/>
   </p:sldIdLst>
   <p:sldSz cx="12192000" cy="6858000"/>
   <p:notesSz cx="6858000" cy="9144000"/>
@@ -296,6 +308,2801 @@
 </p:sld>
 </file>
 
+<file path=ppt/slides/slide10.xml><?xml version="1.0" encoding="utf-8"?>
+<p:sld xmlns:a="http://schemas.openxmlformats.org/drawingml/2006/main" xmlns:p="http://schemas.openxmlformats.org/presentationml/2006/main" xmlns:r="http://schemas.openxmlformats.org/officeDocument/2006/relationships">
+  <p:cSld>
+    <p:spTree>
+      <p:nvGrpSpPr>
+        <p:cNvPr id="1" name=""/>
+        <p:cNvGrpSpPr/>
+        <p:nvPr/>
+      </p:nvGrpSpPr>
+      <p:grpSpPr>
+        <a:xfrm>
+          <a:off x="0" y="0"/>
+          <a:ext cx="0" cy="0"/>
+          <a:chOff x="0" y="0"/>
+          <a:chExt cx="0" cy="0"/>
+        </a:xfrm>
+      </p:grpSpPr>
+      <p:sp>
+        <p:nvSpPr>
+          <p:cNvPr id="2" name="kicker"/>
+          <p:cNvSpPr/>
+          <p:nvPr/>
+        </p:nvSpPr>
+        <p:spPr>
+          <a:xfrm>
+            <a:off x="830000" y="530000"/>
+            <a:ext cx="10532000" cy="360000"/>
+          </a:xfrm>
+          <a:prstGeom prst="rect">
+            <a:avLst/>
+          </a:prstGeom>
+          <a:noFill/>
+          <a:ln>
+            <a:noFill/>
+          </a:ln>
+        </p:spPr>
+        <p:txBody>
+          <a:bodyPr wrap="square" anchor="t">
+            <a:normAutofit/>
+          </a:bodyPr>
+          <a:lstStyle/>
+          <a:p>
+            <a:pPr marL="0" indent="0" lvl="0">
+              <a:buNone/>
+            </a:pPr>
+            <a:r>
+              <a:rPr lang="en-US" sz="1300" b="1" spc="300" dirty="0">
+                <a:solidFill>
+                  <a:srgbClr val="C9A227"/>
+                </a:solidFill>
+                <a:latin typeface="Arial"/>
+                <a:cs typeface="Arial"/>
+              </a:rPr>
+              <a:t>THE CHANGE</a:t>
+            </a:r>
+          </a:p>
+        </p:txBody>
+      </p:sp>
+      <p:sp>
+        <p:nvSpPr>
+          <p:cNvPr id="3" name="title"/>
+          <p:cNvSpPr/>
+          <p:nvPr/>
+        </p:nvSpPr>
+        <p:spPr>
+          <a:xfrm>
+            <a:off x="830000" y="940000"/>
+            <a:ext cx="10532000" cy="1150000"/>
+          </a:xfrm>
+          <a:prstGeom prst="rect">
+            <a:avLst/>
+          </a:prstGeom>
+          <a:noFill/>
+          <a:ln>
+            <a:noFill/>
+          </a:ln>
+        </p:spPr>
+        <p:txBody>
+          <a:bodyPr wrap="square" anchor="t">
+            <a:normAutofit/>
+          </a:bodyPr>
+          <a:lstStyle/>
+          <a:p>
+            <a:pPr marL="0" indent="0" lvl="0">
+              <a:lnSpc>
+                <a:spcPct val="105000"/>
+              </a:lnSpc>
+              <a:buNone/>
+            </a:pPr>
+            <a:r>
+              <a:rPr lang="en-US" sz="2600" b="1" dirty="0">
+                <a:solidFill>
+                  <a:srgbClr val="163A5F"/>
+                </a:solidFill>
+                <a:latin typeface="Arial"/>
+                <a:cs typeface="Arial"/>
+              </a:rPr>
+              <a:t>What changes, side by side</a:t>
+            </a:r>
+          </a:p>
+        </p:txBody>
+      </p:sp>
+      <p:sp>
+        <p:nvSpPr>
+          <p:cNvPr id="4" name="rule"/>
+          <p:cNvSpPr/>
+          <p:nvPr/>
+        </p:nvSpPr>
+        <p:spPr>
+          <a:xfrm>
+            <a:off x="830000" y="2170000"/>
+            <a:ext cx="10532000" cy="25400"/>
+          </a:xfrm>
+          <a:prstGeom prst="rect">
+            <a:avLst/>
+          </a:prstGeom>
+          <a:solidFill>
+            <a:srgbClr val="E3E7EE"/>
+          </a:solidFill>
+          <a:ln>
+            <a:noFill/>
+          </a:ln>
+        </p:spPr>
+        <p:txBody>
+          <a:bodyPr wrap="square" anchor="t">
+            <a:normAutofit/>
+          </a:bodyPr>
+          <a:lstStyle/>
+          <a:p>
+            <a:endParaRPr lang="en-US"/>
+          </a:p>
+        </p:txBody>
+      </p:sp>
+      <p:sp>
+        <p:nvSpPr>
+          <p:cNvPr id="5" name="left_panel"/>
+          <p:cNvSpPr/>
+          <p:nvPr/>
+        </p:nvSpPr>
+        <p:spPr>
+          <a:xfrm>
+            <a:off x="830000" y="2400000"/>
+            <a:ext cx="4866000" cy="3600000"/>
+          </a:xfrm>
+          <a:prstGeom prst="roundRect">
+            <a:avLst>
+              <a:gd name="adj" fmla="val 6000"/>
+            </a:avLst>
+          </a:prstGeom>
+          <a:solidFill>
+            <a:srgbClr val="F2F4F7"/>
+          </a:solidFill>
+          <a:ln>
+            <a:noFill/>
+          </a:ln>
+        </p:spPr>
+        <p:txBody>
+          <a:bodyPr wrap="square" anchor="t">
+            <a:normAutofit/>
+          </a:bodyPr>
+          <a:lstStyle/>
+          <a:p>
+            <a:endParaRPr lang="en-US"/>
+          </a:p>
+        </p:txBody>
+      </p:sp>
+      <p:sp>
+        <p:nvSpPr>
+          <p:cNvPr id="6" name="right_panel"/>
+          <p:cNvSpPr/>
+          <p:nvPr/>
+        </p:nvSpPr>
+        <p:spPr>
+          <a:xfrm>
+            <a:off x="6496000" y="2400000"/>
+            <a:ext cx="4866000" cy="3600000"/>
+          </a:xfrm>
+          <a:prstGeom prst="roundRect">
+            <a:avLst>
+              <a:gd name="adj" fmla="val 6000"/>
+            </a:avLst>
+          </a:prstGeom>
+          <a:solidFill>
+            <a:srgbClr val="F6F0DC"/>
+          </a:solidFill>
+          <a:ln>
+            <a:noFill/>
+          </a:ln>
+          <a:effectLst>
+            <a:outerShdw blurRad="190500" dist="76200" dir="5400000" rotWithShape="0">
+              <a:srgbClr val="0F1B2A">
+                <a:alpha val="25000"/>
+              </a:srgbClr>
+            </a:outerShdw>
+          </a:effectLst>
+        </p:spPr>
+        <p:txBody>
+          <a:bodyPr wrap="square" anchor="t">
+            <a:normAutofit/>
+          </a:bodyPr>
+          <a:lstStyle/>
+          <a:p>
+            <a:endParaRPr lang="en-US"/>
+          </a:p>
+        </p:txBody>
+      </p:sp>
+      <p:sp>
+        <p:nvSpPr>
+          <p:cNvPr id="7" name="divider_arrow"/>
+          <p:cNvSpPr/>
+          <p:nvPr/>
+        </p:nvSpPr>
+        <p:spPr>
+          <a:xfrm>
+            <a:off x="5796000" y="4000000"/>
+            <a:ext cx="600000" cy="400000"/>
+          </a:xfrm>
+          <a:prstGeom prst="rightArrow">
+            <a:avLst/>
+          </a:prstGeom>
+          <a:solidFill>
+            <a:srgbClr val="C9A227"/>
+          </a:solidFill>
+          <a:ln>
+            <a:noFill/>
+          </a:ln>
+        </p:spPr>
+        <p:txBody>
+          <a:bodyPr wrap="square" anchor="t">
+            <a:normAutofit/>
+          </a:bodyPr>
+          <a:lstStyle/>
+          <a:p>
+            <a:endParaRPr lang="en-US"/>
+          </a:p>
+        </p:txBody>
+      </p:sp>
+      <p:sp>
+        <p:nvSpPr>
+          <p:cNvPr id="8" name="left_head"/>
+          <p:cNvSpPr/>
+          <p:nvPr/>
+        </p:nvSpPr>
+        <p:spPr>
+          <a:xfrm>
+            <a:off x="1080000" y="2650000"/>
+            <a:ext cx="4366000" cy="500000"/>
+          </a:xfrm>
+          <a:prstGeom prst="rect">
+            <a:avLst/>
+          </a:prstGeom>
+          <a:noFill/>
+          <a:ln>
+            <a:noFill/>
+          </a:ln>
+        </p:spPr>
+        <p:txBody>
+          <a:bodyPr wrap="square" anchor="t">
+            <a:normAutofit/>
+          </a:bodyPr>
+          <a:lstStyle/>
+          <a:p>
+            <a:pPr marL="0" indent="0" lvl="0">
+              <a:buNone/>
+            </a:pPr>
+            <a:r>
+              <a:rPr lang="en-US" sz="1800" b="1" dirty="0">
+                <a:solidFill>
+                  <a:srgbClr val="6B7280"/>
+                </a:solidFill>
+                <a:latin typeface="Arial"/>
+                <a:cs typeface="Arial"/>
+              </a:rPr>
+              <a:t>Before</a:t>
+            </a:r>
+          </a:p>
+        </p:txBody>
+      </p:sp>
+      <p:sp>
+        <p:nvSpPr>
+          <p:cNvPr id="9" name="left_body"/>
+          <p:cNvSpPr/>
+          <p:nvPr/>
+        </p:nvSpPr>
+        <p:spPr>
+          <a:xfrm>
+            <a:off x="1080000" y="3250000"/>
+            <a:ext cx="4366000" cy="2600000"/>
+          </a:xfrm>
+          <a:prstGeom prst="rect">
+            <a:avLst/>
+          </a:prstGeom>
+          <a:noFill/>
+          <a:ln>
+            <a:noFill/>
+          </a:ln>
+        </p:spPr>
+        <p:txBody>
+          <a:bodyPr wrap="square" anchor="t">
+            <a:normAutofit/>
+          </a:bodyPr>
+          <a:lstStyle/>
+          <a:p>
+            <a:pPr marL="0" indent="0" lvl="0">
+              <a:lnSpc>
+                <a:spcPct val="115000"/>
+              </a:lnSpc>
+              <a:spcBef>
+                <a:spcPts val="600"/>
+              </a:spcBef>
+              <a:buNone/>
+            </a:pPr>
+            <a:r>
+              <a:rPr lang="en-US" sz="1800" dirty="0">
+                <a:solidFill>
+                  <a:srgbClr val="6B7280"/>
+                </a:solidFill>
+                <a:latin typeface="Arial"/>
+                <a:cs typeface="Arial"/>
+              </a:rPr>
+              <a:t>Mirrored attribute, plainly stated</a:t>
+            </a:r>
+          </a:p>
+        </p:txBody>
+      </p:sp>
+      <p:sp>
+        <p:nvSpPr>
+          <p:cNvPr id="10" name="right_head"/>
+          <p:cNvSpPr/>
+          <p:nvPr/>
+        </p:nvSpPr>
+        <p:spPr>
+          <a:xfrm>
+            <a:off x="6746000" y="2650000"/>
+            <a:ext cx="4366000" cy="500000"/>
+          </a:xfrm>
+          <a:prstGeom prst="rect">
+            <a:avLst/>
+          </a:prstGeom>
+          <a:noFill/>
+          <a:ln>
+            <a:noFill/>
+          </a:ln>
+        </p:spPr>
+        <p:txBody>
+          <a:bodyPr wrap="square" anchor="t">
+            <a:normAutofit/>
+          </a:bodyPr>
+          <a:lstStyle/>
+          <a:p>
+            <a:pPr marL="0" indent="0" lvl="0">
+              <a:buNone/>
+            </a:pPr>
+            <a:r>
+              <a:rPr lang="en-US" sz="1800" b="1" dirty="0">
+                <a:solidFill>
+                  <a:srgbClr val="163A5F"/>
+                </a:solidFill>
+                <a:latin typeface="Arial"/>
+                <a:cs typeface="Arial"/>
+              </a:rPr>
+              <a:t>After</a:t>
+            </a:r>
+          </a:p>
+        </p:txBody>
+      </p:sp>
+      <p:sp>
+        <p:nvSpPr>
+          <p:cNvPr id="11" name="right_body"/>
+          <p:cNvSpPr/>
+          <p:nvPr/>
+        </p:nvSpPr>
+        <p:spPr>
+          <a:xfrm>
+            <a:off x="6746000" y="3250000"/>
+            <a:ext cx="4366000" cy="2600000"/>
+          </a:xfrm>
+          <a:prstGeom prst="rect">
+            <a:avLst/>
+          </a:prstGeom>
+          <a:noFill/>
+          <a:ln>
+            <a:noFill/>
+          </a:ln>
+        </p:spPr>
+        <p:txBody>
+          <a:bodyPr wrap="square" anchor="t">
+            <a:normAutofit/>
+          </a:bodyPr>
+          <a:lstStyle/>
+          <a:p>
+            <a:pPr marL="0" indent="0" lvl="0">
+              <a:lnSpc>
+                <a:spcPct val="115000"/>
+              </a:lnSpc>
+              <a:spcBef>
+                <a:spcPts val="600"/>
+              </a:spcBef>
+              <a:buNone/>
+            </a:pPr>
+            <a:r>
+              <a:rPr lang="en-US" sz="1800" dirty="0">
+                <a:solidFill>
+                  <a:srgbClr val="20242C"/>
+                </a:solidFill>
+                <a:latin typeface="Arial"/>
+                <a:cs typeface="Arial"/>
+              </a:rPr>
+              <a:t>Mirrored attribute, plainly stated</a:t>
+            </a:r>
+          </a:p>
+        </p:txBody>
+      </p:sp>
+      <p:sp>
+        <p:nvSpPr>
+          <p:cNvPr id="12" name="source"/>
+          <p:cNvSpPr/>
+          <p:nvPr/>
+        </p:nvSpPr>
+        <p:spPr>
+          <a:xfrm>
+            <a:off x="830000" y="6020000"/>
+            <a:ext cx="10532000" cy="280000"/>
+          </a:xfrm>
+          <a:prstGeom prst="rect">
+            <a:avLst/>
+          </a:prstGeom>
+          <a:noFill/>
+          <a:ln>
+            <a:noFill/>
+          </a:ln>
+        </p:spPr>
+        <p:txBody>
+          <a:bodyPr wrap="square" anchor="t">
+            <a:normAutofit/>
+          </a:bodyPr>
+          <a:lstStyle/>
+          <a:p>
+            <a:pPr marL="0" indent="0" lvl="0">
+              <a:buNone/>
+            </a:pPr>
+            <a:r>
+              <a:rPr lang="en-US" sz="1100" dirty="0">
+                <a:solidFill>
+                  <a:srgbClr val="6B7280"/>
+                </a:solidFill>
+                <a:latin typeface="Arial"/>
+                <a:cs typeface="Arial"/>
+              </a:rPr>
+              <a:t/>
+            </a:r>
+          </a:p>
+        </p:txBody>
+      </p:sp>
+      <p:sp>
+        <p:nvSpPr>
+          <p:cNvPr id="13" name="footer"/>
+          <p:cNvSpPr/>
+          <p:nvPr/>
+        </p:nvSpPr>
+        <p:spPr>
+          <a:xfrm>
+            <a:off x="830000" y="6350000"/>
+            <a:ext cx="10532000" cy="330000"/>
+          </a:xfrm>
+          <a:prstGeom prst="rect">
+            <a:avLst/>
+          </a:prstGeom>
+          <a:noFill/>
+          <a:ln>
+            <a:noFill/>
+          </a:ln>
+        </p:spPr>
+        <p:txBody>
+          <a:bodyPr wrap="square" anchor="t">
+            <a:normAutofit/>
+          </a:bodyPr>
+          <a:lstStyle/>
+          <a:p>
+            <a:pPr marL="0" indent="0" lvl="0">
+              <a:buNone/>
+            </a:pPr>
+            <a:r>
+              <a:rPr lang="en-US" sz="1100" dirty="0">
+                <a:solidFill>
+                  <a:srgbClr val="6B7280"/>
+                </a:solidFill>
+                <a:latin typeface="Arial"/>
+                <a:cs typeface="Arial"/>
+              </a:rPr>
+              <a:t>Deck title · 1</a:t>
+            </a:r>
+          </a:p>
+        </p:txBody>
+      </p:sp>
+    </p:spTree>
+  </p:cSld>
+  <p:clrMapOvr>
+    <a:masterClrMapping/>
+  </p:clrMapOvr>
+</p:sld>
+</file>
+
+<file path=ppt/slides/slide11.xml><?xml version="1.0" encoding="utf-8"?>
+<p:sld xmlns:a="http://schemas.openxmlformats.org/drawingml/2006/main" xmlns:p="http://schemas.openxmlformats.org/presentationml/2006/main" xmlns:r="http://schemas.openxmlformats.org/officeDocument/2006/relationships">
+  <p:cSld>
+    <p:spTree>
+      <p:nvGrpSpPr>
+        <p:cNvPr id="1" name=""/>
+        <p:cNvGrpSpPr/>
+        <p:nvPr/>
+      </p:nvGrpSpPr>
+      <p:grpSpPr>
+        <a:xfrm>
+          <a:off x="0" y="0"/>
+          <a:ext cx="0" cy="0"/>
+          <a:chOff x="0" y="0"/>
+          <a:chExt cx="0" cy="0"/>
+        </a:xfrm>
+      </p:grpSpPr>
+      <p:sp>
+        <p:nvSpPr>
+          <p:cNvPr id="2" name="quote_glyph"/>
+          <p:cNvSpPr/>
+          <p:nvPr/>
+        </p:nvSpPr>
+        <p:spPr>
+          <a:xfrm>
+            <a:off x="780000" y="1250000"/>
+            <a:ext cx="1800000" cy="1800000"/>
+          </a:xfrm>
+          <a:prstGeom prst="rect">
+            <a:avLst/>
+          </a:prstGeom>
+          <a:noFill/>
+          <a:ln>
+            <a:noFill/>
+          </a:ln>
+        </p:spPr>
+        <p:txBody>
+          <a:bodyPr wrap="square" anchor="t">
+            <a:normAutofit/>
+          </a:bodyPr>
+          <a:lstStyle/>
+          <a:p>
+            <a:pPr marL="0" indent="0" lvl="0">
+              <a:buNone/>
+            </a:pPr>
+            <a:r>
+              <a:rPr lang="en-US" sz="12000" b="1" dirty="0">
+                <a:solidFill>
+                  <a:srgbClr val="C9A227"/>
+                </a:solidFill>
+                <a:latin typeface="Arial"/>
+                <a:cs typeface="Arial"/>
+              </a:rPr>
+              <a:t>“</a:t>
+            </a:r>
+          </a:p>
+        </p:txBody>
+      </p:sp>
+      <p:sp>
+        <p:nvSpPr>
+          <p:cNvPr id="3" name="quote"/>
+          <p:cNvSpPr/>
+          <p:nvPr/>
+        </p:nvSpPr>
+        <p:spPr>
+          <a:xfrm>
+            <a:off x="1430000" y="2500000"/>
+            <a:ext cx="9330000" cy="2300000"/>
+          </a:xfrm>
+          <a:prstGeom prst="rect">
+            <a:avLst/>
+          </a:prstGeom>
+          <a:noFill/>
+          <a:ln>
+            <a:noFill/>
+          </a:ln>
+        </p:spPr>
+        <p:txBody>
+          <a:bodyPr wrap="square" anchor="t">
+            <a:normAutofit/>
+          </a:bodyPr>
+          <a:lstStyle/>
+          <a:p>
+            <a:pPr marL="0" indent="0" lvl="0">
+              <a:lnSpc>
+                <a:spcPct val="110000"/>
+              </a:lnSpc>
+              <a:buNone/>
+            </a:pPr>
+            <a:r>
+              <a:rPr lang="en-US" sz="3200" dirty="0">
+                <a:solidFill>
+                  <a:srgbClr val="163A5F"/>
+                </a:solidFill>
+                <a:latin typeface="Arial"/>
+                <a:cs typeface="Arial"/>
+              </a:rPr>
+              <a:t>A short quotation that carries a number does the arguing for you.</a:t>
+            </a:r>
+          </a:p>
+        </p:txBody>
+      </p:sp>
+      <p:sp>
+        <p:nvSpPr>
+          <p:cNvPr id="4" name="attribution"/>
+          <p:cNvSpPr/>
+          <p:nvPr/>
+        </p:nvSpPr>
+        <p:spPr>
+          <a:xfrm>
+            <a:off x="1430000" y="5000000"/>
+            <a:ext cx="9330000" cy="500000"/>
+          </a:xfrm>
+          <a:prstGeom prst="rect">
+            <a:avLst/>
+          </a:prstGeom>
+          <a:noFill/>
+          <a:ln>
+            <a:noFill/>
+          </a:ln>
+        </p:spPr>
+        <p:txBody>
+          <a:bodyPr wrap="square" anchor="t">
+            <a:normAutofit/>
+          </a:bodyPr>
+          <a:lstStyle/>
+          <a:p>
+            <a:pPr marL="0" indent="0" lvl="0">
+              <a:buNone/>
+            </a:pPr>
+            <a:r>
+              <a:rPr lang="en-US" sz="1600" dirty="0">
+                <a:solidFill>
+                  <a:srgbClr val="6B7280"/>
+                </a:solidFill>
+                <a:latin typeface="Arial"/>
+                <a:cs typeface="Arial"/>
+              </a:rPr>
+              <a:t>— Customer name, role</a:t>
+            </a:r>
+          </a:p>
+        </p:txBody>
+      </p:sp>
+      <p:sp>
+        <p:nvSpPr>
+          <p:cNvPr id="5" name="footer"/>
+          <p:cNvSpPr/>
+          <p:nvPr/>
+        </p:nvSpPr>
+        <p:spPr>
+          <a:xfrm>
+            <a:off x="830000" y="6350000"/>
+            <a:ext cx="10532000" cy="330000"/>
+          </a:xfrm>
+          <a:prstGeom prst="rect">
+            <a:avLst/>
+          </a:prstGeom>
+          <a:noFill/>
+          <a:ln>
+            <a:noFill/>
+          </a:ln>
+        </p:spPr>
+        <p:txBody>
+          <a:bodyPr wrap="square" anchor="t">
+            <a:normAutofit/>
+          </a:bodyPr>
+          <a:lstStyle/>
+          <a:p>
+            <a:pPr marL="0" indent="0" lvl="0">
+              <a:buNone/>
+            </a:pPr>
+            <a:r>
+              <a:rPr lang="en-US" sz="1100" dirty="0">
+                <a:solidFill>
+                  <a:srgbClr val="6B7280"/>
+                </a:solidFill>
+                <a:latin typeface="Arial"/>
+                <a:cs typeface="Arial"/>
+              </a:rPr>
+              <a:t>Deck title · 1</a:t>
+            </a:r>
+          </a:p>
+        </p:txBody>
+      </p:sp>
+    </p:spTree>
+  </p:cSld>
+  <p:clrMapOvr>
+    <a:masterClrMapping/>
+  </p:clrMapOvr>
+</p:sld>
+</file>
+
+<file path=ppt/slides/slide12.xml><?xml version="1.0" encoding="utf-8"?>
+<p:sld xmlns:a="http://schemas.openxmlformats.org/drawingml/2006/main" xmlns:p="http://schemas.openxmlformats.org/presentationml/2006/main" xmlns:r="http://schemas.openxmlformats.org/officeDocument/2006/relationships">
+  <p:cSld>
+    <p:spTree>
+      <p:nvGrpSpPr>
+        <p:cNvPr id="1" name=""/>
+        <p:cNvGrpSpPr/>
+        <p:nvPr/>
+      </p:nvGrpSpPr>
+      <p:grpSpPr>
+        <a:xfrm>
+          <a:off x="0" y="0"/>
+          <a:ext cx="0" cy="0"/>
+          <a:chOff x="0" y="0"/>
+          <a:chExt cx="0" cy="0"/>
+        </a:xfrm>
+      </p:grpSpPr>
+      <p:sp>
+        <p:nvSpPr>
+          <p:cNvPr id="2" name="kicker"/>
+          <p:cNvSpPr/>
+          <p:nvPr/>
+        </p:nvSpPr>
+        <p:spPr>
+          <a:xfrm>
+            <a:off x="830000" y="530000"/>
+            <a:ext cx="10532000" cy="360000"/>
+          </a:xfrm>
+          <a:prstGeom prst="rect">
+            <a:avLst/>
+          </a:prstGeom>
+          <a:noFill/>
+          <a:ln>
+            <a:noFill/>
+          </a:ln>
+        </p:spPr>
+        <p:txBody>
+          <a:bodyPr wrap="square" anchor="t">
+            <a:normAutofit/>
+          </a:bodyPr>
+          <a:lstStyle/>
+          <a:p>
+            <a:pPr marL="0" indent="0" lvl="0">
+              <a:buNone/>
+            </a:pPr>
+            <a:r>
+              <a:rPr lang="en-US" sz="1300" b="1" spc="300" dirty="0">
+                <a:solidFill>
+                  <a:srgbClr val="C9A227"/>
+                </a:solidFill>
+                <a:latin typeface="Arial"/>
+                <a:cs typeface="Arial"/>
+              </a:rPr>
+              <a:t>STATUS</a:t>
+            </a:r>
+          </a:p>
+        </p:txBody>
+      </p:sp>
+      <p:sp>
+        <p:nvSpPr>
+          <p:cNvPr id="3" name="title"/>
+          <p:cNvSpPr/>
+          <p:nvPr/>
+        </p:nvSpPr>
+        <p:spPr>
+          <a:xfrm>
+            <a:off x="830000" y="940000"/>
+            <a:ext cx="10532000" cy="1150000"/>
+          </a:xfrm>
+          <a:prstGeom prst="rect">
+            <a:avLst/>
+          </a:prstGeom>
+          <a:noFill/>
+          <a:ln>
+            <a:noFill/>
+          </a:ln>
+        </p:spPr>
+        <p:txBody>
+          <a:bodyPr wrap="square" anchor="t">
+            <a:normAutofit/>
+          </a:bodyPr>
+          <a:lstStyle/>
+          <a:p>
+            <a:pPr marL="0" indent="0" lvl="0">
+              <a:lnSpc>
+                <a:spcPct val="105000"/>
+              </a:lnSpc>
+              <a:buNone/>
+            </a:pPr>
+            <a:r>
+              <a:rPr lang="en-US" sz="2600" b="1" dirty="0">
+                <a:solidFill>
+                  <a:srgbClr val="163A5F"/>
+                </a:solidFill>
+                <a:latin typeface="Arial"/>
+                <a:cs typeface="Arial"/>
+              </a:rPr>
+              <a:t>The quarter at a glance, then the two things to fix</a:t>
+            </a:r>
+          </a:p>
+        </p:txBody>
+      </p:sp>
+      <p:sp>
+        <p:nvSpPr>
+          <p:cNvPr id="4" name="rule"/>
+          <p:cNvSpPr/>
+          <p:nvPr/>
+        </p:nvSpPr>
+        <p:spPr>
+          <a:xfrm>
+            <a:off x="830000" y="2170000"/>
+            <a:ext cx="10532000" cy="25400"/>
+          </a:xfrm>
+          <a:prstGeom prst="rect">
+            <a:avLst/>
+          </a:prstGeom>
+          <a:solidFill>
+            <a:srgbClr val="E3E7EE"/>
+          </a:solidFill>
+          <a:ln>
+            <a:noFill/>
+          </a:ln>
+        </p:spPr>
+        <p:txBody>
+          <a:bodyPr wrap="square" anchor="t">
+            <a:normAutofit/>
+          </a:bodyPr>
+          <a:lstStyle/>
+          <a:p>
+            <a:endParaRPr lang="en-US"/>
+          </a:p>
+        </p:txBody>
+      </p:sp>
+      <p:sp>
+        <p:nvSpPr>
+          <p:cNvPr id="5" name="source"/>
+          <p:cNvSpPr/>
+          <p:nvPr/>
+        </p:nvSpPr>
+        <p:spPr>
+          <a:xfrm>
+            <a:off x="830000" y="6020000"/>
+            <a:ext cx="10532000" cy="280000"/>
+          </a:xfrm>
+          <a:prstGeom prst="rect">
+            <a:avLst/>
+          </a:prstGeom>
+          <a:noFill/>
+          <a:ln>
+            <a:noFill/>
+          </a:ln>
+        </p:spPr>
+        <p:txBody>
+          <a:bodyPr wrap="square" anchor="t">
+            <a:normAutofit/>
+          </a:bodyPr>
+          <a:lstStyle/>
+          <a:p>
+            <a:pPr marL="0" indent="0" lvl="0">
+              <a:buNone/>
+            </a:pPr>
+            <a:r>
+              <a:rPr lang="en-US" sz="1100" dirty="0">
+                <a:solidFill>
+                  <a:srgbClr val="6B7280"/>
+                </a:solidFill>
+                <a:latin typeface="Arial"/>
+                <a:cs typeface="Arial"/>
+              </a:rPr>
+              <a:t/>
+            </a:r>
+          </a:p>
+        </p:txBody>
+      </p:sp>
+      <p:sp>
+        <p:nvSpPr>
+          <p:cNvPr id="6" name="footer"/>
+          <p:cNvSpPr/>
+          <p:nvPr/>
+        </p:nvSpPr>
+        <p:spPr>
+          <a:xfrm>
+            <a:off x="830000" y="6350000"/>
+            <a:ext cx="10532000" cy="330000"/>
+          </a:xfrm>
+          <a:prstGeom prst="rect">
+            <a:avLst/>
+          </a:prstGeom>
+          <a:noFill/>
+          <a:ln>
+            <a:noFill/>
+          </a:ln>
+        </p:spPr>
+        <p:txBody>
+          <a:bodyPr wrap="square" anchor="t">
+            <a:normAutofit/>
+          </a:bodyPr>
+          <a:lstStyle/>
+          <a:p>
+            <a:pPr marL="0" indent="0" lvl="0">
+              <a:buNone/>
+            </a:pPr>
+            <a:r>
+              <a:rPr lang="en-US" sz="1100" dirty="0">
+                <a:solidFill>
+                  <a:srgbClr val="6B7280"/>
+                </a:solidFill>
+                <a:latin typeface="Arial"/>
+                <a:cs typeface="Arial"/>
+              </a:rPr>
+              <a:t>Deck title · 1</a:t>
+            </a:r>
+          </a:p>
+        </p:txBody>
+      </p:sp>
+    </p:spTree>
+  </p:cSld>
+  <p:clrMapOvr>
+    <a:masterClrMapping/>
+  </p:clrMapOvr>
+</p:sld>
+</file>
+
+<file path=ppt/slides/slide13.xml><?xml version="1.0" encoding="utf-8"?>
+<p:sld xmlns:a="http://schemas.openxmlformats.org/drawingml/2006/main" xmlns:p="http://schemas.openxmlformats.org/presentationml/2006/main" xmlns:r="http://schemas.openxmlformats.org/officeDocument/2006/relationships">
+  <p:cSld>
+    <p:spTree>
+      <p:nvGrpSpPr>
+        <p:cNvPr id="1" name=""/>
+        <p:cNvGrpSpPr/>
+        <p:nvPr/>
+      </p:nvGrpSpPr>
+      <p:grpSpPr>
+        <a:xfrm>
+          <a:off x="0" y="0"/>
+          <a:ext cx="0" cy="0"/>
+          <a:chOff x="0" y="0"/>
+          <a:chExt cx="0" cy="0"/>
+        </a:xfrm>
+      </p:grpSpPr>
+      <p:sp>
+        <p:nvSpPr>
+          <p:cNvPr id="2" name="kicker"/>
+          <p:cNvSpPr/>
+          <p:nvPr/>
+        </p:nvSpPr>
+        <p:spPr>
+          <a:xfrm>
+            <a:off x="830000" y="530000"/>
+            <a:ext cx="10532000" cy="360000"/>
+          </a:xfrm>
+          <a:prstGeom prst="rect">
+            <a:avLst/>
+          </a:prstGeom>
+          <a:noFill/>
+          <a:ln>
+            <a:noFill/>
+          </a:ln>
+        </p:spPr>
+        <p:txBody>
+          <a:bodyPr wrap="square" anchor="t">
+            <a:normAutofit/>
+          </a:bodyPr>
+          <a:lstStyle/>
+          <a:p>
+            <a:pPr marL="0" indent="0" lvl="0">
+              <a:buNone/>
+            </a:pPr>
+            <a:r>
+              <a:rPr lang="en-US" sz="1300" b="1" spc="300" dirty="0">
+                <a:solidFill>
+                  <a:srgbClr val="C9A227"/>
+                </a:solidFill>
+                <a:latin typeface="Arial"/>
+                <a:cs typeface="Arial"/>
+              </a:rPr>
+              <a:t>EVIDENCE</a:t>
+            </a:r>
+          </a:p>
+        </p:txBody>
+      </p:sp>
+      <p:sp>
+        <p:nvSpPr>
+          <p:cNvPr id="3" name="title"/>
+          <p:cNvSpPr/>
+          <p:nvPr/>
+        </p:nvSpPr>
+        <p:spPr>
+          <a:xfrm>
+            <a:off x="830000" y="940000"/>
+            <a:ext cx="10532000" cy="1150000"/>
+          </a:xfrm>
+          <a:prstGeom prst="rect">
+            <a:avLst/>
+          </a:prstGeom>
+          <a:noFill/>
+          <a:ln>
+            <a:noFill/>
+          </a:ln>
+        </p:spPr>
+        <p:txBody>
+          <a:bodyPr wrap="square" anchor="t">
+            <a:normAutofit/>
+          </a:bodyPr>
+          <a:lstStyle/>
+          <a:p>
+            <a:pPr marL="0" indent="0" lvl="0">
+              <a:lnSpc>
+                <a:spcPct val="105000"/>
+              </a:lnSpc>
+              <a:buNone/>
+            </a:pPr>
+            <a:r>
+              <a:rPr lang="en-US" sz="2600" b="1" dirty="0">
+                <a:solidFill>
+                  <a:srgbClr val="163A5F"/>
+                </a:solidFill>
+                <a:latin typeface="Arial"/>
+                <a:cs typeface="Arial"/>
+              </a:rPr>
+              <a:t>The takeaway stated as a sentence, proven at left</a:t>
+            </a:r>
+          </a:p>
+        </p:txBody>
+      </p:sp>
+      <p:sp>
+        <p:nvSpPr>
+          <p:cNvPr id="4" name="rule"/>
+          <p:cNvSpPr/>
+          <p:nvPr/>
+        </p:nvSpPr>
+        <p:spPr>
+          <a:xfrm>
+            <a:off x="830000" y="2170000"/>
+            <a:ext cx="10532000" cy="25400"/>
+          </a:xfrm>
+          <a:prstGeom prst="rect">
+            <a:avLst/>
+          </a:prstGeom>
+          <a:solidFill>
+            <a:srgbClr val="E3E7EE"/>
+          </a:solidFill>
+          <a:ln>
+            <a:noFill/>
+          </a:ln>
+        </p:spPr>
+        <p:txBody>
+          <a:bodyPr wrap="square" anchor="t">
+            <a:normAutofit/>
+          </a:bodyPr>
+          <a:lstStyle/>
+          <a:p>
+            <a:endParaRPr lang="en-US"/>
+          </a:p>
+        </p:txBody>
+      </p:sp>
+      <p:sp>
+        <p:nvSpPr>
+          <p:cNvPr id="5" name="callout_card"/>
+          <p:cNvSpPr/>
+          <p:nvPr/>
+        </p:nvSpPr>
+        <p:spPr>
+          <a:xfrm>
+            <a:off x="7900000" y="2400000"/>
+            <a:ext cx="3462000" cy="3500000"/>
+          </a:xfrm>
+          <a:prstGeom prst="roundRect">
+            <a:avLst>
+              <a:gd name="adj" fmla="val 6000"/>
+            </a:avLst>
+          </a:prstGeom>
+          <a:solidFill>
+            <a:srgbClr val="FFFFFF"/>
+          </a:solidFill>
+          <a:ln>
+            <a:noFill/>
+          </a:ln>
+          <a:effectLst>
+            <a:outerShdw blurRad="190500" dist="76200" dir="5400000" rotWithShape="0">
+              <a:srgbClr val="0F1B2A">
+                <a:alpha val="25000"/>
+              </a:srgbClr>
+            </a:outerShdw>
+          </a:effectLst>
+        </p:spPr>
+        <p:txBody>
+          <a:bodyPr wrap="square" anchor="t">
+            <a:normAutofit/>
+          </a:bodyPr>
+          <a:lstStyle/>
+          <a:p>
+            <a:endParaRPr lang="en-US"/>
+          </a:p>
+        </p:txBody>
+      </p:sp>
+      <p:sp>
+        <p:nvSpPr>
+          <p:cNvPr id="6" name="callout_head"/>
+          <p:cNvSpPr/>
+          <p:nvPr/>
+        </p:nvSpPr>
+        <p:spPr>
+          <a:xfrm>
+            <a:off x="8150000" y="2650000"/>
+            <a:ext cx="2962000" cy="500000"/>
+          </a:xfrm>
+          <a:prstGeom prst="rect">
+            <a:avLst/>
+          </a:prstGeom>
+          <a:noFill/>
+          <a:ln>
+            <a:noFill/>
+          </a:ln>
+        </p:spPr>
+        <p:txBody>
+          <a:bodyPr wrap="square" anchor="t">
+            <a:normAutofit/>
+          </a:bodyPr>
+          <a:lstStyle/>
+          <a:p>
+            <a:pPr marL="0" indent="0" lvl="0">
+              <a:buNone/>
+            </a:pPr>
+            <a:r>
+              <a:rPr lang="en-US" sz="1800" b="1" dirty="0">
+                <a:solidFill>
+                  <a:srgbClr val="C9A227"/>
+                </a:solidFill>
+                <a:latin typeface="Arial"/>
+                <a:cs typeface="Arial"/>
+              </a:rPr>
+              <a:t>So what</a:t>
+            </a:r>
+          </a:p>
+        </p:txBody>
+      </p:sp>
+      <p:sp>
+        <p:nvSpPr>
+          <p:cNvPr id="7" name="callout_body"/>
+          <p:cNvSpPr/>
+          <p:nvPr/>
+        </p:nvSpPr>
+        <p:spPr>
+          <a:xfrm>
+            <a:off x="8150000" y="3250000"/>
+            <a:ext cx="2962000" cy="2400000"/>
+          </a:xfrm>
+          <a:prstGeom prst="rect">
+            <a:avLst/>
+          </a:prstGeom>
+          <a:noFill/>
+          <a:ln>
+            <a:noFill/>
+          </a:ln>
+        </p:spPr>
+        <p:txBody>
+          <a:bodyPr wrap="square" anchor="t">
+            <a:normAutofit/>
+          </a:bodyPr>
+          <a:lstStyle/>
+          <a:p>
+            <a:pPr marL="0" indent="0" lvl="0">
+              <a:lnSpc>
+                <a:spcPct val="115000"/>
+              </a:lnSpc>
+              <a:spcBef>
+                <a:spcPts val="600"/>
+              </a:spcBef>
+              <a:buNone/>
+            </a:pPr>
+            <a:r>
+              <a:rPr lang="en-US" sz="1800" dirty="0">
+                <a:solidFill>
+                  <a:srgbClr val="20242C"/>
+                </a:solidFill>
+                <a:latin typeface="Arial"/>
+                <a:cs typeface="Arial"/>
+              </a:rPr>
+              <a:t>Three to five short lines</a:t>
+            </a:r>
+          </a:p>
+        </p:txBody>
+      </p:sp>
+      <p:sp>
+        <p:nvSpPr>
+          <p:cNvPr id="8" name="source"/>
+          <p:cNvSpPr/>
+          <p:nvPr/>
+        </p:nvSpPr>
+        <p:spPr>
+          <a:xfrm>
+            <a:off x="830000" y="6020000"/>
+            <a:ext cx="10532000" cy="280000"/>
+          </a:xfrm>
+          <a:prstGeom prst="rect">
+            <a:avLst/>
+          </a:prstGeom>
+          <a:noFill/>
+          <a:ln>
+            <a:noFill/>
+          </a:ln>
+        </p:spPr>
+        <p:txBody>
+          <a:bodyPr wrap="square" anchor="t">
+            <a:normAutofit/>
+          </a:bodyPr>
+          <a:lstStyle/>
+          <a:p>
+            <a:pPr marL="0" indent="0" lvl="0">
+              <a:buNone/>
+            </a:pPr>
+            <a:r>
+              <a:rPr lang="en-US" sz="1100" dirty="0">
+                <a:solidFill>
+                  <a:srgbClr val="6B7280"/>
+                </a:solidFill>
+                <a:latin typeface="Arial"/>
+                <a:cs typeface="Arial"/>
+              </a:rPr>
+              <a:t>Source: internal data (2026)</a:t>
+            </a:r>
+          </a:p>
+        </p:txBody>
+      </p:sp>
+      <p:sp>
+        <p:nvSpPr>
+          <p:cNvPr id="9" name="footer"/>
+          <p:cNvSpPr/>
+          <p:nvPr/>
+        </p:nvSpPr>
+        <p:spPr>
+          <a:xfrm>
+            <a:off x="830000" y="6350000"/>
+            <a:ext cx="10532000" cy="330000"/>
+          </a:xfrm>
+          <a:prstGeom prst="rect">
+            <a:avLst/>
+          </a:prstGeom>
+          <a:noFill/>
+          <a:ln>
+            <a:noFill/>
+          </a:ln>
+        </p:spPr>
+        <p:txBody>
+          <a:bodyPr wrap="square" anchor="t">
+            <a:normAutofit/>
+          </a:bodyPr>
+          <a:lstStyle/>
+          <a:p>
+            <a:pPr marL="0" indent="0" lvl="0">
+              <a:buNone/>
+            </a:pPr>
+            <a:r>
+              <a:rPr lang="en-US" sz="1100" dirty="0">
+                <a:solidFill>
+                  <a:srgbClr val="6B7280"/>
+                </a:solidFill>
+                <a:latin typeface="Arial"/>
+                <a:cs typeface="Arial"/>
+              </a:rPr>
+              <a:t>Deck title · 1</a:t>
+            </a:r>
+          </a:p>
+        </p:txBody>
+      </p:sp>
+    </p:spTree>
+  </p:cSld>
+  <p:clrMapOvr>
+    <a:masterClrMapping/>
+  </p:clrMapOvr>
+</p:sld>
+</file>
+
+<file path=ppt/slides/slide14.xml><?xml version="1.0" encoding="utf-8"?>
+<p:sld xmlns:a="http://schemas.openxmlformats.org/drawingml/2006/main" xmlns:p="http://schemas.openxmlformats.org/presentationml/2006/main" xmlns:r="http://schemas.openxmlformats.org/officeDocument/2006/relationships">
+  <p:cSld>
+    <p:spTree>
+      <p:nvGrpSpPr>
+        <p:cNvPr id="1" name=""/>
+        <p:cNvGrpSpPr/>
+        <p:nvPr/>
+      </p:nvGrpSpPr>
+      <p:grpSpPr>
+        <a:xfrm>
+          <a:off x="0" y="0"/>
+          <a:ext cx="0" cy="0"/>
+          <a:chOff x="0" y="0"/>
+          <a:chExt cx="0" cy="0"/>
+        </a:xfrm>
+      </p:grpSpPr>
+      <p:sp>
+        <p:nvSpPr>
+          <p:cNvPr id="2" name="kicker"/>
+          <p:cNvSpPr/>
+          <p:nvPr/>
+        </p:nvSpPr>
+        <p:spPr>
+          <a:xfrm>
+            <a:off x="830000" y="530000"/>
+            <a:ext cx="10532000" cy="360000"/>
+          </a:xfrm>
+          <a:prstGeom prst="rect">
+            <a:avLst/>
+          </a:prstGeom>
+          <a:noFill/>
+          <a:ln>
+            <a:noFill/>
+          </a:ln>
+        </p:spPr>
+        <p:txBody>
+          <a:bodyPr wrap="square" anchor="t">
+            <a:normAutofit/>
+          </a:bodyPr>
+          <a:lstStyle/>
+          <a:p>
+            <a:pPr marL="0" indent="0" lvl="0">
+              <a:buNone/>
+            </a:pPr>
+            <a:r>
+              <a:rPr lang="en-US" sz="1300" b="1" spc="300" dirty="0">
+                <a:solidFill>
+                  <a:srgbClr val="C9A227"/>
+                </a:solidFill>
+                <a:latin typeface="Arial"/>
+                <a:cs typeface="Arial"/>
+              </a:rPr>
+              <a:t>THE SOLUTION</a:t>
+            </a:r>
+          </a:p>
+        </p:txBody>
+      </p:sp>
+      <p:sp>
+        <p:nvSpPr>
+          <p:cNvPr id="3" name="title"/>
+          <p:cNvSpPr/>
+          <p:nvPr/>
+        </p:nvSpPr>
+        <p:spPr>
+          <a:xfrm>
+            <a:off x="830000" y="940000"/>
+            <a:ext cx="10532000" cy="1150000"/>
+          </a:xfrm>
+          <a:prstGeom prst="rect">
+            <a:avLst/>
+          </a:prstGeom>
+          <a:noFill/>
+          <a:ln>
+            <a:noFill/>
+          </a:ln>
+        </p:spPr>
+        <p:txBody>
+          <a:bodyPr wrap="square" anchor="t">
+            <a:normAutofit/>
+          </a:bodyPr>
+          <a:lstStyle/>
+          <a:p>
+            <a:pPr marL="0" indent="0" lvl="0">
+              <a:lnSpc>
+                <a:spcPct val="105000"/>
+              </a:lnSpc>
+              <a:buNone/>
+            </a:pPr>
+            <a:r>
+              <a:rPr lang="en-US" sz="2600" b="1" dirty="0">
+                <a:solidFill>
+                  <a:srgbClr val="163A5F"/>
+                </a:solidFill>
+                <a:latin typeface="Arial"/>
+                <a:cs typeface="Arial"/>
+              </a:rPr>
+              <a:t>Three moves deliver the outcome</a:t>
+            </a:r>
+          </a:p>
+        </p:txBody>
+      </p:sp>
+      <p:sp>
+        <p:nvSpPr>
+          <p:cNvPr id="4" name="rule"/>
+          <p:cNvSpPr/>
+          <p:nvPr/>
+        </p:nvSpPr>
+        <p:spPr>
+          <a:xfrm>
+            <a:off x="830000" y="2170000"/>
+            <a:ext cx="10532000" cy="25400"/>
+          </a:xfrm>
+          <a:prstGeom prst="rect">
+            <a:avLst/>
+          </a:prstGeom>
+          <a:solidFill>
+            <a:srgbClr val="E3E7EE"/>
+          </a:solidFill>
+          <a:ln>
+            <a:noFill/>
+          </a:ln>
+        </p:spPr>
+        <p:txBody>
+          <a:bodyPr wrap="square" anchor="t">
+            <a:normAutofit/>
+          </a:bodyPr>
+          <a:lstStyle/>
+          <a:p>
+            <a:endParaRPr lang="en-US"/>
+          </a:p>
+        </p:txBody>
+      </p:sp>
+      <p:sp>
+        <p:nvSpPr>
+          <p:cNvPr id="5" name="card1"/>
+          <p:cNvSpPr/>
+          <p:nvPr/>
+        </p:nvSpPr>
+        <p:spPr>
+          <a:xfrm>
+            <a:off x="830000" y="2400000"/>
+            <a:ext cx="3310000" cy="3600000"/>
+          </a:xfrm>
+          <a:prstGeom prst="roundRect">
+            <a:avLst>
+              <a:gd name="adj" fmla="val 6000"/>
+            </a:avLst>
+          </a:prstGeom>
+          <a:solidFill>
+            <a:srgbClr val="FFFFFF"/>
+          </a:solidFill>
+          <a:ln>
+            <a:noFill/>
+          </a:ln>
+          <a:effectLst>
+            <a:outerShdw blurRad="190500" dist="76200" dir="5400000" rotWithShape="0">
+              <a:srgbClr val="0F1B2A">
+                <a:alpha val="25000"/>
+              </a:srgbClr>
+            </a:outerShdw>
+          </a:effectLst>
+        </p:spPr>
+        <p:txBody>
+          <a:bodyPr wrap="square" anchor="t">
+            <a:normAutofit/>
+          </a:bodyPr>
+          <a:lstStyle/>
+          <a:p>
+            <a:endParaRPr lang="en-US"/>
+          </a:p>
+        </p:txBody>
+      </p:sp>
+      <p:sp>
+        <p:nvSpPr>
+          <p:cNvPr id="6" name="card2"/>
+          <p:cNvSpPr/>
+          <p:nvPr/>
+        </p:nvSpPr>
+        <p:spPr>
+          <a:xfrm>
+            <a:off x="4441000" y="2400000"/>
+            <a:ext cx="3310000" cy="3600000"/>
+          </a:xfrm>
+          <a:prstGeom prst="roundRect">
+            <a:avLst>
+              <a:gd name="adj" fmla="val 6000"/>
+            </a:avLst>
+          </a:prstGeom>
+          <a:solidFill>
+            <a:srgbClr val="FFFFFF"/>
+          </a:solidFill>
+          <a:ln>
+            <a:noFill/>
+          </a:ln>
+          <a:effectLst>
+            <a:outerShdw blurRad="190500" dist="76200" dir="5400000" rotWithShape="0">
+              <a:srgbClr val="0F1B2A">
+                <a:alpha val="25000"/>
+              </a:srgbClr>
+            </a:outerShdw>
+          </a:effectLst>
+        </p:spPr>
+        <p:txBody>
+          <a:bodyPr wrap="square" anchor="t">
+            <a:normAutofit/>
+          </a:bodyPr>
+          <a:lstStyle/>
+          <a:p>
+            <a:endParaRPr lang="en-US"/>
+          </a:p>
+        </p:txBody>
+      </p:sp>
+      <p:sp>
+        <p:nvSpPr>
+          <p:cNvPr id="7" name="card3"/>
+          <p:cNvSpPr/>
+          <p:nvPr/>
+        </p:nvSpPr>
+        <p:spPr>
+          <a:xfrm>
+            <a:off x="8052000" y="2400000"/>
+            <a:ext cx="3310000" cy="3600000"/>
+          </a:xfrm>
+          <a:prstGeom prst="roundRect">
+            <a:avLst>
+              <a:gd name="adj" fmla="val 6000"/>
+            </a:avLst>
+          </a:prstGeom>
+          <a:solidFill>
+            <a:srgbClr val="FFFFFF"/>
+          </a:solidFill>
+          <a:ln>
+            <a:noFill/>
+          </a:ln>
+          <a:effectLst>
+            <a:outerShdw blurRad="190500" dist="76200" dir="5400000" rotWithShape="0">
+              <a:srgbClr val="0F1B2A">
+                <a:alpha val="25000"/>
+              </a:srgbClr>
+            </a:outerShdw>
+          </a:effectLst>
+        </p:spPr>
+        <p:txBody>
+          <a:bodyPr wrap="square" anchor="t">
+            <a:normAutofit/>
+          </a:bodyPr>
+          <a:lstStyle/>
+          <a:p>
+            <a:endParaRPr lang="en-US"/>
+          </a:p>
+        </p:txBody>
+      </p:sp>
+      <p:sp>
+        <p:nvSpPr>
+          <p:cNvPr id="8" name="card1_head"/>
+          <p:cNvSpPr/>
+          <p:nvPr/>
+        </p:nvSpPr>
+        <p:spPr>
+          <a:xfrm>
+            <a:off x="1080000" y="3700000"/>
+            <a:ext cx="2810000" cy="500000"/>
+          </a:xfrm>
+          <a:prstGeom prst="rect">
+            <a:avLst/>
+          </a:prstGeom>
+          <a:noFill/>
+          <a:ln>
+            <a:noFill/>
+          </a:ln>
+        </p:spPr>
+        <p:txBody>
+          <a:bodyPr wrap="square" anchor="t">
+            <a:normAutofit/>
+          </a:bodyPr>
+          <a:lstStyle/>
+          <a:p>
+            <a:pPr marL="0" indent="0" lvl="0">
+              <a:buNone/>
+            </a:pPr>
+            <a:r>
+              <a:rPr lang="en-US" sz="2000" b="1" dirty="0">
+                <a:solidFill>
+                  <a:srgbClr val="163A5F"/>
+                </a:solidFill>
+                <a:latin typeface="Arial"/>
+                <a:cs typeface="Arial"/>
+              </a:rPr>
+              <a:t>Pillar one</a:t>
+            </a:r>
+          </a:p>
+        </p:txBody>
+      </p:sp>
+      <p:sp>
+        <p:nvSpPr>
+          <p:cNvPr id="9" name="card2_head"/>
+          <p:cNvSpPr/>
+          <p:nvPr/>
+        </p:nvSpPr>
+        <p:spPr>
+          <a:xfrm>
+            <a:off x="4691000" y="3700000"/>
+            <a:ext cx="2810000" cy="500000"/>
+          </a:xfrm>
+          <a:prstGeom prst="rect">
+            <a:avLst/>
+          </a:prstGeom>
+          <a:noFill/>
+          <a:ln>
+            <a:noFill/>
+          </a:ln>
+        </p:spPr>
+        <p:txBody>
+          <a:bodyPr wrap="square" anchor="t">
+            <a:normAutofit/>
+          </a:bodyPr>
+          <a:lstStyle/>
+          <a:p>
+            <a:pPr marL="0" indent="0" lvl="0">
+              <a:buNone/>
+            </a:pPr>
+            <a:r>
+              <a:rPr lang="en-US" sz="2000" b="1" dirty="0">
+                <a:solidFill>
+                  <a:srgbClr val="163A5F"/>
+                </a:solidFill>
+                <a:latin typeface="Arial"/>
+                <a:cs typeface="Arial"/>
+              </a:rPr>
+              <a:t>Pillar two</a:t>
+            </a:r>
+          </a:p>
+        </p:txBody>
+      </p:sp>
+      <p:sp>
+        <p:nvSpPr>
+          <p:cNvPr id="10" name="card3_head"/>
+          <p:cNvSpPr/>
+          <p:nvPr/>
+        </p:nvSpPr>
+        <p:spPr>
+          <a:xfrm>
+            <a:off x="8302000" y="3700000"/>
+            <a:ext cx="2810000" cy="500000"/>
+          </a:xfrm>
+          <a:prstGeom prst="rect">
+            <a:avLst/>
+          </a:prstGeom>
+          <a:noFill/>
+          <a:ln>
+            <a:noFill/>
+          </a:ln>
+        </p:spPr>
+        <p:txBody>
+          <a:bodyPr wrap="square" anchor="t">
+            <a:normAutofit/>
+          </a:bodyPr>
+          <a:lstStyle/>
+          <a:p>
+            <a:pPr marL="0" indent="0" lvl="0">
+              <a:buNone/>
+            </a:pPr>
+            <a:r>
+              <a:rPr lang="en-US" sz="2000" b="1" dirty="0">
+                <a:solidFill>
+                  <a:srgbClr val="163A5F"/>
+                </a:solidFill>
+                <a:latin typeface="Arial"/>
+                <a:cs typeface="Arial"/>
+              </a:rPr>
+              <a:t>Pillar three</a:t>
+            </a:r>
+          </a:p>
+        </p:txBody>
+      </p:sp>
+      <p:sp>
+        <p:nvSpPr>
+          <p:cNvPr id="11" name="card1_line"/>
+          <p:cNvSpPr/>
+          <p:nvPr/>
+        </p:nvSpPr>
+        <p:spPr>
+          <a:xfrm>
+            <a:off x="1080000" y="4300000"/>
+            <a:ext cx="2810000" cy="1400000"/>
+          </a:xfrm>
+          <a:prstGeom prst="rect">
+            <a:avLst/>
+          </a:prstGeom>
+          <a:noFill/>
+          <a:ln>
+            <a:noFill/>
+          </a:ln>
+        </p:spPr>
+        <p:txBody>
+          <a:bodyPr wrap="square" anchor="t">
+            <a:normAutofit/>
+          </a:bodyPr>
+          <a:lstStyle/>
+          <a:p>
+            <a:pPr marL="0" indent="0" lvl="0">
+              <a:lnSpc>
+                <a:spcPct val="115000"/>
+              </a:lnSpc>
+              <a:buNone/>
+            </a:pPr>
+            <a:r>
+              <a:rPr lang="en-US" sz="1800" dirty="0">
+                <a:solidFill>
+                  <a:srgbClr val="6B7280"/>
+                </a:solidFill>
+                <a:latin typeface="Arial"/>
+                <a:cs typeface="Arial"/>
+              </a:rPr>
+              <a:t>One line that earns the pillar</a:t>
+            </a:r>
+          </a:p>
+        </p:txBody>
+      </p:sp>
+      <p:sp>
+        <p:nvSpPr>
+          <p:cNvPr id="12" name="card2_line"/>
+          <p:cNvSpPr/>
+          <p:nvPr/>
+        </p:nvSpPr>
+        <p:spPr>
+          <a:xfrm>
+            <a:off x="4691000" y="4300000"/>
+            <a:ext cx="2810000" cy="1400000"/>
+          </a:xfrm>
+          <a:prstGeom prst="rect">
+            <a:avLst/>
+          </a:prstGeom>
+          <a:noFill/>
+          <a:ln>
+            <a:noFill/>
+          </a:ln>
+        </p:spPr>
+        <p:txBody>
+          <a:bodyPr wrap="square" anchor="t">
+            <a:normAutofit/>
+          </a:bodyPr>
+          <a:lstStyle/>
+          <a:p>
+            <a:pPr marL="0" indent="0" lvl="0">
+              <a:lnSpc>
+                <a:spcPct val="115000"/>
+              </a:lnSpc>
+              <a:buNone/>
+            </a:pPr>
+            <a:r>
+              <a:rPr lang="en-US" sz="1800" dirty="0">
+                <a:solidFill>
+                  <a:srgbClr val="6B7280"/>
+                </a:solidFill>
+                <a:latin typeface="Arial"/>
+                <a:cs typeface="Arial"/>
+              </a:rPr>
+              <a:t>One line that earns the pillar</a:t>
+            </a:r>
+          </a:p>
+        </p:txBody>
+      </p:sp>
+      <p:sp>
+        <p:nvSpPr>
+          <p:cNvPr id="13" name="card3_line"/>
+          <p:cNvSpPr/>
+          <p:nvPr/>
+        </p:nvSpPr>
+        <p:spPr>
+          <a:xfrm>
+            <a:off x="8302000" y="4300000"/>
+            <a:ext cx="2810000" cy="1400000"/>
+          </a:xfrm>
+          <a:prstGeom prst="rect">
+            <a:avLst/>
+          </a:prstGeom>
+          <a:noFill/>
+          <a:ln>
+            <a:noFill/>
+          </a:ln>
+        </p:spPr>
+        <p:txBody>
+          <a:bodyPr wrap="square" anchor="t">
+            <a:normAutofit/>
+          </a:bodyPr>
+          <a:lstStyle/>
+          <a:p>
+            <a:pPr marL="0" indent="0" lvl="0">
+              <a:lnSpc>
+                <a:spcPct val="115000"/>
+              </a:lnSpc>
+              <a:buNone/>
+            </a:pPr>
+            <a:r>
+              <a:rPr lang="en-US" sz="1800" dirty="0">
+                <a:solidFill>
+                  <a:srgbClr val="6B7280"/>
+                </a:solidFill>
+                <a:latin typeface="Arial"/>
+                <a:cs typeface="Arial"/>
+              </a:rPr>
+              <a:t>One line that earns the pillar</a:t>
+            </a:r>
+          </a:p>
+        </p:txBody>
+      </p:sp>
+      <p:sp>
+        <p:nvSpPr>
+          <p:cNvPr id="14" name="footer"/>
+          <p:cNvSpPr/>
+          <p:nvPr/>
+        </p:nvSpPr>
+        <p:spPr>
+          <a:xfrm>
+            <a:off x="830000" y="6350000"/>
+            <a:ext cx="10532000" cy="330000"/>
+          </a:xfrm>
+          <a:prstGeom prst="rect">
+            <a:avLst/>
+          </a:prstGeom>
+          <a:noFill/>
+          <a:ln>
+            <a:noFill/>
+          </a:ln>
+        </p:spPr>
+        <p:txBody>
+          <a:bodyPr wrap="square" anchor="t">
+            <a:normAutofit/>
+          </a:bodyPr>
+          <a:lstStyle/>
+          <a:p>
+            <a:pPr marL="0" indent="0" lvl="0">
+              <a:buNone/>
+            </a:pPr>
+            <a:r>
+              <a:rPr lang="en-US" sz="1100" dirty="0">
+                <a:solidFill>
+                  <a:srgbClr val="6B7280"/>
+                </a:solidFill>
+                <a:latin typeface="Arial"/>
+                <a:cs typeface="Arial"/>
+              </a:rPr>
+              <a:t>Deck title · 1</a:t>
+            </a:r>
+          </a:p>
+        </p:txBody>
+      </p:sp>
+    </p:spTree>
+  </p:cSld>
+  <p:clrMapOvr>
+    <a:masterClrMapping/>
+  </p:clrMapOvr>
+</p:sld>
+</file>
+
+<file path=ppt/slides/slide15.xml><?xml version="1.0" encoding="utf-8"?>
+<p:sld xmlns:a="http://schemas.openxmlformats.org/drawingml/2006/main" xmlns:p="http://schemas.openxmlformats.org/presentationml/2006/main" xmlns:r="http://schemas.openxmlformats.org/officeDocument/2006/relationships">
+  <p:cSld>
+    <p:spTree>
+      <p:nvGrpSpPr>
+        <p:cNvPr id="1" name=""/>
+        <p:cNvGrpSpPr/>
+        <p:nvPr/>
+      </p:nvGrpSpPr>
+      <p:grpSpPr>
+        <a:xfrm>
+          <a:off x="0" y="0"/>
+          <a:ext cx="0" cy="0"/>
+          <a:chOff x="0" y="0"/>
+          <a:chExt cx="0" cy="0"/>
+        </a:xfrm>
+      </p:grpSpPr>
+      <p:sp>
+        <p:nvSpPr>
+          <p:cNvPr id="2" name="kicker"/>
+          <p:cNvSpPr/>
+          <p:nvPr/>
+        </p:nvSpPr>
+        <p:spPr>
+          <a:xfrm>
+            <a:off x="830000" y="530000"/>
+            <a:ext cx="10532000" cy="360000"/>
+          </a:xfrm>
+          <a:prstGeom prst="rect">
+            <a:avLst/>
+          </a:prstGeom>
+          <a:noFill/>
+          <a:ln>
+            <a:noFill/>
+          </a:ln>
+        </p:spPr>
+        <p:txBody>
+          <a:bodyPr wrap="square" anchor="t">
+            <a:normAutofit/>
+          </a:bodyPr>
+          <a:lstStyle/>
+          <a:p>
+            <a:pPr marL="0" indent="0" lvl="0">
+              <a:buNone/>
+            </a:pPr>
+            <a:r>
+              <a:rPr lang="en-US" sz="1300" b="1" spc="300" dirty="0">
+                <a:solidFill>
+                  <a:srgbClr val="C9A227"/>
+                </a:solidFill>
+                <a:latin typeface="Arial"/>
+                <a:cs typeface="Arial"/>
+              </a:rPr>
+              <a:t>HOW IT WORKS</a:t>
+            </a:r>
+          </a:p>
+        </p:txBody>
+      </p:sp>
+      <p:sp>
+        <p:nvSpPr>
+          <p:cNvPr id="3" name="title"/>
+          <p:cNvSpPr/>
+          <p:nvPr/>
+        </p:nvSpPr>
+        <p:spPr>
+          <a:xfrm>
+            <a:off x="830000" y="940000"/>
+            <a:ext cx="10532000" cy="1150000"/>
+          </a:xfrm>
+          <a:prstGeom prst="rect">
+            <a:avLst/>
+          </a:prstGeom>
+          <a:noFill/>
+          <a:ln>
+            <a:noFill/>
+          </a:ln>
+        </p:spPr>
+        <p:txBody>
+          <a:bodyPr wrap="square" anchor="t">
+            <a:normAutofit/>
+          </a:bodyPr>
+          <a:lstStyle/>
+          <a:p>
+            <a:pPr marL="0" indent="0" lvl="0">
+              <a:lnSpc>
+                <a:spcPct val="105000"/>
+              </a:lnSpc>
+              <a:buNone/>
+            </a:pPr>
+            <a:r>
+              <a:rPr lang="en-US" sz="2600" b="1" dirty="0">
+                <a:solidFill>
+                  <a:srgbClr val="163A5F"/>
+                </a:solidFill>
+                <a:latin typeface="Arial"/>
+                <a:cs typeface="Arial"/>
+              </a:rPr>
+              <a:t>Five steps or fewer, and where the magic happens</a:t>
+            </a:r>
+          </a:p>
+        </p:txBody>
+      </p:sp>
+      <p:sp>
+        <p:nvSpPr>
+          <p:cNvPr id="4" name="rule"/>
+          <p:cNvSpPr/>
+          <p:nvPr/>
+        </p:nvSpPr>
+        <p:spPr>
+          <a:xfrm>
+            <a:off x="830000" y="2170000"/>
+            <a:ext cx="10532000" cy="25400"/>
+          </a:xfrm>
+          <a:prstGeom prst="rect">
+            <a:avLst/>
+          </a:prstGeom>
+          <a:solidFill>
+            <a:srgbClr val="E3E7EE"/>
+          </a:solidFill>
+          <a:ln>
+            <a:noFill/>
+          </a:ln>
+        </p:spPr>
+        <p:txBody>
+          <a:bodyPr wrap="square" anchor="t">
+            <a:normAutofit/>
+          </a:bodyPr>
+          <a:lstStyle/>
+          <a:p>
+            <a:endParaRPr lang="en-US"/>
+          </a:p>
+        </p:txBody>
+      </p:sp>
+      <p:sp>
+        <p:nvSpPr>
+          <p:cNvPr id="5" name="source"/>
+          <p:cNvSpPr/>
+          <p:nvPr/>
+        </p:nvSpPr>
+        <p:spPr>
+          <a:xfrm>
+            <a:off x="830000" y="6020000"/>
+            <a:ext cx="10532000" cy="280000"/>
+          </a:xfrm>
+          <a:prstGeom prst="rect">
+            <a:avLst/>
+          </a:prstGeom>
+          <a:noFill/>
+          <a:ln>
+            <a:noFill/>
+          </a:ln>
+        </p:spPr>
+        <p:txBody>
+          <a:bodyPr wrap="square" anchor="t">
+            <a:normAutofit/>
+          </a:bodyPr>
+          <a:lstStyle/>
+          <a:p>
+            <a:pPr marL="0" indent="0" lvl="0">
+              <a:buNone/>
+            </a:pPr>
+            <a:r>
+              <a:rPr lang="en-US" sz="1100" dirty="0">
+                <a:solidFill>
+                  <a:srgbClr val="6B7280"/>
+                </a:solidFill>
+                <a:latin typeface="Arial"/>
+                <a:cs typeface="Arial"/>
+              </a:rPr>
+              <a:t/>
+            </a:r>
+          </a:p>
+        </p:txBody>
+      </p:sp>
+      <p:sp>
+        <p:nvSpPr>
+          <p:cNvPr id="6" name="footer"/>
+          <p:cNvSpPr/>
+          <p:nvPr/>
+        </p:nvSpPr>
+        <p:spPr>
+          <a:xfrm>
+            <a:off x="830000" y="6350000"/>
+            <a:ext cx="10532000" cy="330000"/>
+          </a:xfrm>
+          <a:prstGeom prst="rect">
+            <a:avLst/>
+          </a:prstGeom>
+          <a:noFill/>
+          <a:ln>
+            <a:noFill/>
+          </a:ln>
+        </p:spPr>
+        <p:txBody>
+          <a:bodyPr wrap="square" anchor="t">
+            <a:normAutofit/>
+          </a:bodyPr>
+          <a:lstStyle/>
+          <a:p>
+            <a:pPr marL="0" indent="0" lvl="0">
+              <a:buNone/>
+            </a:pPr>
+            <a:r>
+              <a:rPr lang="en-US" sz="1100" dirty="0">
+                <a:solidFill>
+                  <a:srgbClr val="6B7280"/>
+                </a:solidFill>
+                <a:latin typeface="Arial"/>
+                <a:cs typeface="Arial"/>
+              </a:rPr>
+              <a:t>Deck title · 1</a:t>
+            </a:r>
+          </a:p>
+        </p:txBody>
+      </p:sp>
+    </p:spTree>
+  </p:cSld>
+  <p:clrMapOvr>
+    <a:masterClrMapping/>
+  </p:clrMapOvr>
+</p:sld>
+</file>
+
+<file path=ppt/slides/slide16.xml><?xml version="1.0" encoding="utf-8"?>
+<p:sld xmlns:a="http://schemas.openxmlformats.org/drawingml/2006/main" xmlns:p="http://schemas.openxmlformats.org/presentationml/2006/main" xmlns:r="http://schemas.openxmlformats.org/officeDocument/2006/relationships">
+  <p:cSld>
+    <p:spTree>
+      <p:nvGrpSpPr>
+        <p:cNvPr id="1" name=""/>
+        <p:cNvGrpSpPr/>
+        <p:nvPr/>
+      </p:nvGrpSpPr>
+      <p:grpSpPr>
+        <a:xfrm>
+          <a:off x="0" y="0"/>
+          <a:ext cx="0" cy="0"/>
+          <a:chOff x="0" y="0"/>
+          <a:chExt cx="0" cy="0"/>
+        </a:xfrm>
+      </p:grpSpPr>
+      <p:sp>
+        <p:nvSpPr>
+          <p:cNvPr id="2" name="kicker"/>
+          <p:cNvSpPr/>
+          <p:nvPr/>
+        </p:nvSpPr>
+        <p:spPr>
+          <a:xfrm>
+            <a:off x="830000" y="530000"/>
+            <a:ext cx="10532000" cy="360000"/>
+          </a:xfrm>
+          <a:prstGeom prst="rect">
+            <a:avLst/>
+          </a:prstGeom>
+          <a:noFill/>
+          <a:ln>
+            <a:noFill/>
+          </a:ln>
+        </p:spPr>
+        <p:txBody>
+          <a:bodyPr wrap="square" anchor="t">
+            <a:normAutofit/>
+          </a:bodyPr>
+          <a:lstStyle/>
+          <a:p>
+            <a:pPr marL="0" indent="0" lvl="0">
+              <a:buNone/>
+            </a:pPr>
+            <a:r>
+              <a:rPr lang="en-US" sz="1300" b="1" spc="300" dirty="0">
+                <a:solidFill>
+                  <a:srgbClr val="C9A227"/>
+                </a:solidFill>
+                <a:latin typeface="Arial"/>
+                <a:cs typeface="Arial"/>
+              </a:rPr>
+              <a:t>ROADMAP</a:t>
+            </a:r>
+          </a:p>
+        </p:txBody>
+      </p:sp>
+      <p:sp>
+        <p:nvSpPr>
+          <p:cNvPr id="3" name="title"/>
+          <p:cNvSpPr/>
+          <p:nvPr/>
+        </p:nvSpPr>
+        <p:spPr>
+          <a:xfrm>
+            <a:off x="830000" y="940000"/>
+            <a:ext cx="10532000" cy="1150000"/>
+          </a:xfrm>
+          <a:prstGeom prst="rect">
+            <a:avLst/>
+          </a:prstGeom>
+          <a:noFill/>
+          <a:ln>
+            <a:noFill/>
+          </a:ln>
+        </p:spPr>
+        <p:txBody>
+          <a:bodyPr wrap="square" anchor="t">
+            <a:normAutofit/>
+          </a:bodyPr>
+          <a:lstStyle/>
+          <a:p>
+            <a:pPr marL="0" indent="0" lvl="0">
+              <a:lnSpc>
+                <a:spcPct val="105000"/>
+              </a:lnSpc>
+              <a:buNone/>
+            </a:pPr>
+            <a:r>
+              <a:rPr lang="en-US" sz="2600" b="1" dirty="0">
+                <a:solidFill>
+                  <a:srgbClr val="163A5F"/>
+                </a:solidFill>
+                <a:latin typeface="Arial"/>
+                <a:cs typeface="Arial"/>
+              </a:rPr>
+              <a:t>What ships when, and the decision points</a:t>
+            </a:r>
+          </a:p>
+        </p:txBody>
+      </p:sp>
+      <p:sp>
+        <p:nvSpPr>
+          <p:cNvPr id="4" name="rule"/>
+          <p:cNvSpPr/>
+          <p:nvPr/>
+        </p:nvSpPr>
+        <p:spPr>
+          <a:xfrm>
+            <a:off x="830000" y="2170000"/>
+            <a:ext cx="10532000" cy="25400"/>
+          </a:xfrm>
+          <a:prstGeom prst="rect">
+            <a:avLst/>
+          </a:prstGeom>
+          <a:solidFill>
+            <a:srgbClr val="E3E7EE"/>
+          </a:solidFill>
+          <a:ln>
+            <a:noFill/>
+          </a:ln>
+        </p:spPr>
+        <p:txBody>
+          <a:bodyPr wrap="square" anchor="t">
+            <a:normAutofit/>
+          </a:bodyPr>
+          <a:lstStyle/>
+          <a:p>
+            <a:endParaRPr lang="en-US"/>
+          </a:p>
+        </p:txBody>
+      </p:sp>
+      <p:sp>
+        <p:nvSpPr>
+          <p:cNvPr id="5" name="source"/>
+          <p:cNvSpPr/>
+          <p:nvPr/>
+        </p:nvSpPr>
+        <p:spPr>
+          <a:xfrm>
+            <a:off x="830000" y="6020000"/>
+            <a:ext cx="10532000" cy="280000"/>
+          </a:xfrm>
+          <a:prstGeom prst="rect">
+            <a:avLst/>
+          </a:prstGeom>
+          <a:noFill/>
+          <a:ln>
+            <a:noFill/>
+          </a:ln>
+        </p:spPr>
+        <p:txBody>
+          <a:bodyPr wrap="square" anchor="t">
+            <a:normAutofit/>
+          </a:bodyPr>
+          <a:lstStyle/>
+          <a:p>
+            <a:pPr marL="0" indent="0" lvl="0">
+              <a:buNone/>
+            </a:pPr>
+            <a:r>
+              <a:rPr lang="en-US" sz="1100" dirty="0">
+                <a:solidFill>
+                  <a:srgbClr val="6B7280"/>
+                </a:solidFill>
+                <a:latin typeface="Arial"/>
+                <a:cs typeface="Arial"/>
+              </a:rPr>
+              <a:t/>
+            </a:r>
+          </a:p>
+        </p:txBody>
+      </p:sp>
+      <p:sp>
+        <p:nvSpPr>
+          <p:cNvPr id="6" name="footer"/>
+          <p:cNvSpPr/>
+          <p:nvPr/>
+        </p:nvSpPr>
+        <p:spPr>
+          <a:xfrm>
+            <a:off x="830000" y="6350000"/>
+            <a:ext cx="10532000" cy="330000"/>
+          </a:xfrm>
+          <a:prstGeom prst="rect">
+            <a:avLst/>
+          </a:prstGeom>
+          <a:noFill/>
+          <a:ln>
+            <a:noFill/>
+          </a:ln>
+        </p:spPr>
+        <p:txBody>
+          <a:bodyPr wrap="square" anchor="t">
+            <a:normAutofit/>
+          </a:bodyPr>
+          <a:lstStyle/>
+          <a:p>
+            <a:pPr marL="0" indent="0" lvl="0">
+              <a:buNone/>
+            </a:pPr>
+            <a:r>
+              <a:rPr lang="en-US" sz="1100" dirty="0">
+                <a:solidFill>
+                  <a:srgbClr val="6B7280"/>
+                </a:solidFill>
+                <a:latin typeface="Arial"/>
+                <a:cs typeface="Arial"/>
+              </a:rPr>
+              <a:t>Deck title · 1</a:t>
+            </a:r>
+          </a:p>
+        </p:txBody>
+      </p:sp>
+    </p:spTree>
+  </p:cSld>
+  <p:clrMapOvr>
+    <a:masterClrMapping/>
+  </p:clrMapOvr>
+</p:sld>
+</file>
+
+<file path=ppt/slides/slide17.xml><?xml version="1.0" encoding="utf-8"?>
+<p:sld xmlns:a="http://schemas.openxmlformats.org/drawingml/2006/main" xmlns:p="http://schemas.openxmlformats.org/presentationml/2006/main" xmlns:r="http://schemas.openxmlformats.org/officeDocument/2006/relationships">
+  <p:cSld>
+    <p:spTree>
+      <p:nvGrpSpPr>
+        <p:cNvPr id="1" name=""/>
+        <p:cNvGrpSpPr/>
+        <p:nvPr/>
+      </p:nvGrpSpPr>
+      <p:grpSpPr>
+        <a:xfrm>
+          <a:off x="0" y="0"/>
+          <a:ext cx="0" cy="0"/>
+          <a:chOff x="0" y="0"/>
+          <a:chExt cx="0" cy="0"/>
+        </a:xfrm>
+      </p:grpSpPr>
+      <p:sp>
+        <p:nvSpPr>
+          <p:cNvPr id="2" name="kicker"/>
+          <p:cNvSpPr/>
+          <p:nvPr/>
+        </p:nvSpPr>
+        <p:spPr>
+          <a:xfrm>
+            <a:off x="830000" y="530000"/>
+            <a:ext cx="10532000" cy="360000"/>
+          </a:xfrm>
+          <a:prstGeom prst="rect">
+            <a:avLst/>
+          </a:prstGeom>
+          <a:noFill/>
+          <a:ln>
+            <a:noFill/>
+          </a:ln>
+        </p:spPr>
+        <p:txBody>
+          <a:bodyPr wrap="square" anchor="t">
+            <a:normAutofit/>
+          </a:bodyPr>
+          <a:lstStyle/>
+          <a:p>
+            <a:pPr marL="0" indent="0" lvl="0">
+              <a:buNone/>
+            </a:pPr>
+            <a:r>
+              <a:rPr lang="en-US" sz="1300" b="1" spc="300" dirty="0">
+                <a:solidFill>
+                  <a:srgbClr val="C9A227"/>
+                </a:solidFill>
+                <a:latin typeface="Arial"/>
+                <a:cs typeface="Arial"/>
+              </a:rPr>
+              <a:t>THE TRADE-OFF</a:t>
+            </a:r>
+          </a:p>
+        </p:txBody>
+      </p:sp>
+      <p:sp>
+        <p:nvSpPr>
+          <p:cNvPr id="3" name="title"/>
+          <p:cNvSpPr/>
+          <p:nvPr/>
+        </p:nvSpPr>
+        <p:spPr>
+          <a:xfrm>
+            <a:off x="830000" y="940000"/>
+            <a:ext cx="10532000" cy="1150000"/>
+          </a:xfrm>
+          <a:prstGeom prst="rect">
+            <a:avLst/>
+          </a:prstGeom>
+          <a:noFill/>
+          <a:ln>
+            <a:noFill/>
+          </a:ln>
+        </p:spPr>
+        <p:txBody>
+          <a:bodyPr wrap="square" anchor="t">
+            <a:normAutofit/>
+          </a:bodyPr>
+          <a:lstStyle/>
+          <a:p>
+            <a:pPr marL="0" indent="0" lvl="0">
+              <a:lnSpc>
+                <a:spcPct val="105000"/>
+              </a:lnSpc>
+              <a:buNone/>
+            </a:pPr>
+            <a:r>
+              <a:rPr lang="en-US" sz="2600" b="1" dirty="0">
+                <a:solidFill>
+                  <a:srgbClr val="163A5F"/>
+                </a:solidFill>
+                <a:latin typeface="Arial"/>
+                <a:cs typeface="Arial"/>
+              </a:rPr>
+              <a:t>Where the options land on the two axes that matter</a:t>
+            </a:r>
+          </a:p>
+        </p:txBody>
+      </p:sp>
+      <p:sp>
+        <p:nvSpPr>
+          <p:cNvPr id="4" name="rule"/>
+          <p:cNvSpPr/>
+          <p:nvPr/>
+        </p:nvSpPr>
+        <p:spPr>
+          <a:xfrm>
+            <a:off x="830000" y="2170000"/>
+            <a:ext cx="10532000" cy="25400"/>
+          </a:xfrm>
+          <a:prstGeom prst="rect">
+            <a:avLst/>
+          </a:prstGeom>
+          <a:solidFill>
+            <a:srgbClr val="E3E7EE"/>
+          </a:solidFill>
+          <a:ln>
+            <a:noFill/>
+          </a:ln>
+        </p:spPr>
+        <p:txBody>
+          <a:bodyPr wrap="square" anchor="t">
+            <a:normAutofit/>
+          </a:bodyPr>
+          <a:lstStyle/>
+          <a:p>
+            <a:endParaRPr lang="en-US"/>
+          </a:p>
+        </p:txBody>
+      </p:sp>
+      <p:sp>
+        <p:nvSpPr>
+          <p:cNvPr id="5" name="plot_field"/>
+          <p:cNvSpPr/>
+          <p:nvPr/>
+        </p:nvSpPr>
+        <p:spPr>
+          <a:xfrm>
+            <a:off x="1830000" y="2400000"/>
+            <a:ext cx="8500000" cy="3200000"/>
+          </a:xfrm>
+          <a:prstGeom prst="roundRect">
+            <a:avLst>
+              <a:gd name="adj" fmla="val 3000"/>
+            </a:avLst>
+          </a:prstGeom>
+          <a:solidFill>
+            <a:srgbClr val="F2F4F7"/>
+          </a:solidFill>
+          <a:ln>
+            <a:noFill/>
+          </a:ln>
+        </p:spPr>
+        <p:txBody>
+          <a:bodyPr wrap="square" anchor="t">
+            <a:normAutofit/>
+          </a:bodyPr>
+          <a:lstStyle/>
+          <a:p>
+            <a:endParaRPr lang="en-US"/>
+          </a:p>
+        </p:txBody>
+      </p:sp>
+      <p:sp>
+        <p:nvSpPr>
+          <p:cNvPr id="6" name="axis_v"/>
+          <p:cNvSpPr/>
+          <p:nvPr/>
+        </p:nvSpPr>
+        <p:spPr>
+          <a:xfrm>
+            <a:off x="6073650" y="2400000"/>
+            <a:ext cx="12700" cy="3200000"/>
+          </a:xfrm>
+          <a:prstGeom prst="rect">
+            <a:avLst/>
+          </a:prstGeom>
+          <a:solidFill>
+            <a:srgbClr val="6B7280"/>
+          </a:solidFill>
+          <a:ln>
+            <a:noFill/>
+          </a:ln>
+        </p:spPr>
+        <p:txBody>
+          <a:bodyPr wrap="square" anchor="t">
+            <a:normAutofit/>
+          </a:bodyPr>
+          <a:lstStyle/>
+          <a:p>
+            <a:endParaRPr lang="en-US"/>
+          </a:p>
+        </p:txBody>
+      </p:sp>
+      <p:sp>
+        <p:nvSpPr>
+          <p:cNvPr id="7" name="axis_h"/>
+          <p:cNvSpPr/>
+          <p:nvPr/>
+        </p:nvSpPr>
+        <p:spPr>
+          <a:xfrm>
+            <a:off x="1830000" y="3993650"/>
+            <a:ext cx="8500000" cy="12700"/>
+          </a:xfrm>
+          <a:prstGeom prst="rect">
+            <a:avLst/>
+          </a:prstGeom>
+          <a:solidFill>
+            <a:srgbClr val="6B7280"/>
+          </a:solidFill>
+          <a:ln>
+            <a:noFill/>
+          </a:ln>
+        </p:spPr>
+        <p:txBody>
+          <a:bodyPr wrap="square" anchor="t">
+            <a:normAutofit/>
+          </a:bodyPr>
+          <a:lstStyle/>
+          <a:p>
+            <a:endParaRPr lang="en-US"/>
+          </a:p>
+        </p:txBody>
+      </p:sp>
+      <p:sp>
+        <p:nvSpPr>
+          <p:cNvPr id="8" name="y_label"/>
+          <p:cNvSpPr/>
+          <p:nvPr/>
+        </p:nvSpPr>
+        <p:spPr>
+          <a:xfrm>
+            <a:off x="1980000" y="2480000"/>
+            <a:ext cx="4000000" cy="280000"/>
+          </a:xfrm>
+          <a:prstGeom prst="rect">
+            <a:avLst/>
+          </a:prstGeom>
+          <a:noFill/>
+          <a:ln>
+            <a:noFill/>
+          </a:ln>
+        </p:spPr>
+        <p:txBody>
+          <a:bodyPr wrap="square" anchor="t">
+            <a:normAutofit/>
+          </a:bodyPr>
+          <a:lstStyle/>
+          <a:p>
+            <a:pPr marL="0" indent="0" lvl="0">
+              <a:buNone/>
+            </a:pPr>
+            <a:r>
+              <a:rPr lang="en-US" sz="1200" dirty="0">
+                <a:solidFill>
+                  <a:srgbClr val="6B7280"/>
+                </a:solidFill>
+                <a:latin typeface="Arial"/>
+                <a:cs typeface="Arial"/>
+              </a:rPr>
+              <a:t>Vertical axis: low to high</a:t>
+            </a:r>
+          </a:p>
+        </p:txBody>
+      </p:sp>
+      <p:sp>
+        <p:nvSpPr>
+          <p:cNvPr id="9" name="x_label"/>
+          <p:cNvSpPr/>
+          <p:nvPr/>
+        </p:nvSpPr>
+        <p:spPr>
+          <a:xfrm>
+            <a:off x="6130000" y="5660000"/>
+            <a:ext cx="4050000" cy="240000"/>
+          </a:xfrm>
+          <a:prstGeom prst="rect">
+            <a:avLst/>
+          </a:prstGeom>
+          <a:noFill/>
+          <a:ln>
+            <a:noFill/>
+          </a:ln>
+        </p:spPr>
+        <p:txBody>
+          <a:bodyPr wrap="square" anchor="t">
+            <a:normAutofit/>
+          </a:bodyPr>
+          <a:lstStyle/>
+          <a:p>
+            <a:pPr marL="0" indent="0" lvl="0" algn="r">
+              <a:buNone/>
+            </a:pPr>
+            <a:r>
+              <a:rPr lang="en-US" sz="1200" dirty="0">
+                <a:solidFill>
+                  <a:srgbClr val="6B7280"/>
+                </a:solidFill>
+                <a:latin typeface="Arial"/>
+                <a:cs typeface="Arial"/>
+              </a:rPr>
+              <a:t>Horizontal axis: low to high</a:t>
+            </a:r>
+          </a:p>
+        </p:txBody>
+      </p:sp>
+      <p:sp>
+        <p:nvSpPr>
+          <p:cNvPr id="10" name="q1_label"/>
+          <p:cNvSpPr/>
+          <p:nvPr/>
+        </p:nvSpPr>
+        <p:spPr>
+          <a:xfrm>
+            <a:off x="1980000" y="2800000"/>
+            <a:ext cx="3900000" cy="280000"/>
+          </a:xfrm>
+          <a:prstGeom prst="rect">
+            <a:avLst/>
+          </a:prstGeom>
+          <a:noFill/>
+          <a:ln>
+            <a:noFill/>
+          </a:ln>
+        </p:spPr>
+        <p:txBody>
+          <a:bodyPr wrap="square" anchor="t">
+            <a:normAutofit/>
+          </a:bodyPr>
+          <a:lstStyle/>
+          <a:p>
+            <a:pPr marL="0" indent="0" lvl="0">
+              <a:buNone/>
+            </a:pPr>
+            <a:r>
+              <a:rPr lang="en-US" sz="1100" dirty="0">
+                <a:solidFill>
+                  <a:srgbClr val="6B7280"/>
+                </a:solidFill>
+                <a:latin typeface="Arial"/>
+                <a:cs typeface="Arial"/>
+              </a:rPr>
+              <a:t/>
+            </a:r>
+          </a:p>
+        </p:txBody>
+      </p:sp>
+      <p:sp>
+        <p:nvSpPr>
+          <p:cNvPr id="11" name="q2_label"/>
+          <p:cNvSpPr/>
+          <p:nvPr/>
+        </p:nvSpPr>
+        <p:spPr>
+          <a:xfrm>
+            <a:off x="6180000" y="2800000"/>
+            <a:ext cx="3950000" cy="280000"/>
+          </a:xfrm>
+          <a:prstGeom prst="rect">
+            <a:avLst/>
+          </a:prstGeom>
+          <a:noFill/>
+          <a:ln>
+            <a:noFill/>
+          </a:ln>
+        </p:spPr>
+        <p:txBody>
+          <a:bodyPr wrap="square" anchor="t">
+            <a:normAutofit/>
+          </a:bodyPr>
+          <a:lstStyle/>
+          <a:p>
+            <a:pPr marL="0" indent="0" lvl="0" algn="r">
+              <a:buNone/>
+            </a:pPr>
+            <a:r>
+              <a:rPr lang="en-US" sz="1100" dirty="0">
+                <a:solidFill>
+                  <a:srgbClr val="6B7280"/>
+                </a:solidFill>
+                <a:latin typeface="Arial"/>
+                <a:cs typeface="Arial"/>
+              </a:rPr>
+              <a:t/>
+            </a:r>
+          </a:p>
+        </p:txBody>
+      </p:sp>
+      <p:sp>
+        <p:nvSpPr>
+          <p:cNvPr id="12" name="q3_label"/>
+          <p:cNvSpPr/>
+          <p:nvPr/>
+        </p:nvSpPr>
+        <p:spPr>
+          <a:xfrm>
+            <a:off x="1980000" y="5220000"/>
+            <a:ext cx="3900000" cy="280000"/>
+          </a:xfrm>
+          <a:prstGeom prst="rect">
+            <a:avLst/>
+          </a:prstGeom>
+          <a:noFill/>
+          <a:ln>
+            <a:noFill/>
+          </a:ln>
+        </p:spPr>
+        <p:txBody>
+          <a:bodyPr wrap="square" anchor="t">
+            <a:normAutofit/>
+          </a:bodyPr>
+          <a:lstStyle/>
+          <a:p>
+            <a:pPr marL="0" indent="0" lvl="0">
+              <a:buNone/>
+            </a:pPr>
+            <a:r>
+              <a:rPr lang="en-US" sz="1100" dirty="0">
+                <a:solidFill>
+                  <a:srgbClr val="6B7280"/>
+                </a:solidFill>
+                <a:latin typeface="Arial"/>
+                <a:cs typeface="Arial"/>
+              </a:rPr>
+              <a:t/>
+            </a:r>
+          </a:p>
+        </p:txBody>
+      </p:sp>
+      <p:sp>
+        <p:nvSpPr>
+          <p:cNvPr id="13" name="q4_label"/>
+          <p:cNvSpPr/>
+          <p:nvPr/>
+        </p:nvSpPr>
+        <p:spPr>
+          <a:xfrm>
+            <a:off x="6180000" y="5220000"/>
+            <a:ext cx="3950000" cy="280000"/>
+          </a:xfrm>
+          <a:prstGeom prst="rect">
+            <a:avLst/>
+          </a:prstGeom>
+          <a:noFill/>
+          <a:ln>
+            <a:noFill/>
+          </a:ln>
+        </p:spPr>
+        <p:txBody>
+          <a:bodyPr wrap="square" anchor="t">
+            <a:normAutofit/>
+          </a:bodyPr>
+          <a:lstStyle/>
+          <a:p>
+            <a:pPr marL="0" indent="0" lvl="0" algn="r">
+              <a:buNone/>
+            </a:pPr>
+            <a:r>
+              <a:rPr lang="en-US" sz="1100" dirty="0">
+                <a:solidFill>
+                  <a:srgbClr val="6B7280"/>
+                </a:solidFill>
+                <a:latin typeface="Arial"/>
+                <a:cs typeface="Arial"/>
+              </a:rPr>
+              <a:t/>
+            </a:r>
+          </a:p>
+        </p:txBody>
+      </p:sp>
+      <p:sp>
+        <p:nvSpPr>
+          <p:cNvPr id="14" name="footer"/>
+          <p:cNvSpPr/>
+          <p:nvPr/>
+        </p:nvSpPr>
+        <p:spPr>
+          <a:xfrm>
+            <a:off x="830000" y="6350000"/>
+            <a:ext cx="10532000" cy="330000"/>
+          </a:xfrm>
+          <a:prstGeom prst="rect">
+            <a:avLst/>
+          </a:prstGeom>
+          <a:noFill/>
+          <a:ln>
+            <a:noFill/>
+          </a:ln>
+        </p:spPr>
+        <p:txBody>
+          <a:bodyPr wrap="square" anchor="t">
+            <a:normAutofit/>
+          </a:bodyPr>
+          <a:lstStyle/>
+          <a:p>
+            <a:pPr marL="0" indent="0" lvl="0">
+              <a:buNone/>
+            </a:pPr>
+            <a:r>
+              <a:rPr lang="en-US" sz="1100" dirty="0">
+                <a:solidFill>
+                  <a:srgbClr val="6B7280"/>
+                </a:solidFill>
+                <a:latin typeface="Arial"/>
+                <a:cs typeface="Arial"/>
+              </a:rPr>
+              <a:t>Deck title · 1</a:t>
+            </a:r>
+          </a:p>
+        </p:txBody>
+      </p:sp>
+    </p:spTree>
+  </p:cSld>
+  <p:clrMapOvr>
+    <a:masterClrMapping/>
+  </p:clrMapOvr>
+</p:sld>
+</file>
+
 <file path=ppt/slides/slide2.xml><?xml version="1.0" encoding="utf-8"?>
 <p:sld xmlns:a="http://schemas.openxmlformats.org/drawingml/2006/main" xmlns:p="http://schemas.openxmlformats.org/presentationml/2006/main" xmlns:r="http://schemas.openxmlformats.org/officeDocument/2006/relationships">
   <p:cSld>
@@ -1192,6 +3999,1100 @@
                 <a:cs typeface="Arial"/>
               </a:rPr>
               <a:t>What happens once approved</a:t>
+            </a:r>
+          </a:p>
+        </p:txBody>
+      </p:sp>
+      <p:sp>
+        <p:nvSpPr>
+          <p:cNvPr id="6" name="footer"/>
+          <p:cNvSpPr/>
+          <p:nvPr/>
+        </p:nvSpPr>
+        <p:spPr>
+          <a:xfrm>
+            <a:off x="830000" y="6350000"/>
+            <a:ext cx="10532000" cy="330000"/>
+          </a:xfrm>
+          <a:prstGeom prst="rect">
+            <a:avLst/>
+          </a:prstGeom>
+          <a:noFill/>
+          <a:ln>
+            <a:noFill/>
+          </a:ln>
+        </p:spPr>
+        <p:txBody>
+          <a:bodyPr wrap="square" anchor="t">
+            <a:normAutofit/>
+          </a:bodyPr>
+          <a:lstStyle/>
+          <a:p>
+            <a:pPr marL="0" indent="0" lvl="0">
+              <a:buNone/>
+            </a:pPr>
+            <a:r>
+              <a:rPr lang="en-US" sz="1100" dirty="0">
+                <a:solidFill>
+                  <a:srgbClr val="6B7280"/>
+                </a:solidFill>
+                <a:latin typeface="Arial"/>
+                <a:cs typeface="Arial"/>
+              </a:rPr>
+              <a:t>Deck title · 1</a:t>
+            </a:r>
+          </a:p>
+        </p:txBody>
+      </p:sp>
+    </p:spTree>
+  </p:cSld>
+  <p:clrMapOvr>
+    <a:masterClrMapping/>
+  </p:clrMapOvr>
+</p:sld>
+</file>
+
+<file path=ppt/slides/slide6.xml><?xml version="1.0" encoding="utf-8"?>
+<p:sld xmlns:a="http://schemas.openxmlformats.org/drawingml/2006/main" xmlns:p="http://schemas.openxmlformats.org/presentationml/2006/main" xmlns:r="http://schemas.openxmlformats.org/officeDocument/2006/relationships">
+  <p:cSld>
+    <p:spTree>
+      <p:nvGrpSpPr>
+        <p:cNvPr id="1" name=""/>
+        <p:cNvGrpSpPr/>
+        <p:nvPr/>
+      </p:nvGrpSpPr>
+      <p:grpSpPr>
+        <a:xfrm>
+          <a:off x="0" y="0"/>
+          <a:ext cx="0" cy="0"/>
+          <a:chOff x="0" y="0"/>
+          <a:chExt cx="0" cy="0"/>
+        </a:xfrm>
+      </p:grpSpPr>
+      <p:sp>
+        <p:nvSpPr>
+          <p:cNvPr id="2" name="bg"/>
+          <p:cNvSpPr/>
+          <p:nvPr/>
+        </p:nvSpPr>
+        <p:spPr>
+          <a:xfrm>
+            <a:off x="0" y="0"/>
+            <a:ext cx="12192000" cy="6858000"/>
+          </a:xfrm>
+          <a:prstGeom prst="rect">
+            <a:avLst/>
+          </a:prstGeom>
+          <a:gradFill flip="none" rotWithShape="1">
+            <a:gsLst>
+              <a:gs pos="0">
+                <a:srgbClr val="163A5F"/>
+              </a:gs>
+              <a:gs pos="100000">
+                <a:srgbClr val="2E7DD1"/>
+              </a:gs>
+            </a:gsLst>
+            <a:lin ang="2700000" scaled="1"/>
+          </a:gradFill>
+          <a:ln>
+            <a:noFill/>
+          </a:ln>
+        </p:spPr>
+        <p:txBody>
+          <a:bodyPr wrap="square" anchor="t">
+            <a:normAutofit/>
+          </a:bodyPr>
+          <a:lstStyle/>
+          <a:p>
+            <a:endParaRPr lang="en-US"/>
+          </a:p>
+        </p:txBody>
+      </p:sp>
+      <p:sp>
+        <p:nvSpPr>
+          <p:cNvPr id="3" name="statement"/>
+          <p:cNvSpPr/>
+          <p:nvPr/>
+        </p:nvSpPr>
+        <p:spPr>
+          <a:xfrm>
+            <a:off x="830000" y="2300000"/>
+            <a:ext cx="10532000" cy="1800000"/>
+          </a:xfrm>
+          <a:prstGeom prst="rect">
+            <a:avLst/>
+          </a:prstGeom>
+          <a:noFill/>
+          <a:ln>
+            <a:noFill/>
+          </a:ln>
+        </p:spPr>
+        <p:txBody>
+          <a:bodyPr wrap="square" anchor="ctr">
+            <a:normAutofit/>
+          </a:bodyPr>
+          <a:lstStyle/>
+          <a:p>
+            <a:pPr marL="0" indent="0" lvl="0" algn="ctr">
+              <a:lnSpc>
+                <a:spcPct val="100000"/>
+              </a:lnSpc>
+              <a:buNone/>
+            </a:pPr>
+            <a:r>
+              <a:rPr lang="en-US" sz="7200" b="1" dirty="0">
+                <a:solidFill>
+                  <a:srgbClr val="FFFFFF"/>
+                </a:solidFill>
+                <a:latin typeface="Arial"/>
+                <a:cs typeface="Arial"/>
+              </a:rPr>
+              <a:t>One idea, stated once, at billboard scale</a:t>
+            </a:r>
+          </a:p>
+        </p:txBody>
+      </p:sp>
+      <p:sp>
+        <p:nvSpPr>
+          <p:cNvPr id="4" name="support"/>
+          <p:cNvSpPr/>
+          <p:nvPr/>
+        </p:nvSpPr>
+        <p:spPr>
+          <a:xfrm>
+            <a:off x="830000" y="4300000"/>
+            <a:ext cx="10532000" cy="700000"/>
+          </a:xfrm>
+          <a:prstGeom prst="rect">
+            <a:avLst/>
+          </a:prstGeom>
+          <a:noFill/>
+          <a:ln>
+            <a:noFill/>
+          </a:ln>
+        </p:spPr>
+        <p:txBody>
+          <a:bodyPr wrap="square" anchor="t">
+            <a:normAutofit/>
+          </a:bodyPr>
+          <a:lstStyle/>
+          <a:p>
+            <a:pPr marL="0" indent="0" lvl="0" algn="ctr">
+              <a:buNone/>
+            </a:pPr>
+            <a:r>
+              <a:rPr lang="en-US" sz="2000" dirty="0">
+                <a:solidFill>
+                  <a:srgbClr val="B9C6D8"/>
+                </a:solidFill>
+                <a:latin typeface="Arial"/>
+                <a:cs typeface="Arial"/>
+              </a:rPr>
+              <a:t>A single quiet line of support</a:t>
+            </a:r>
+          </a:p>
+        </p:txBody>
+      </p:sp>
+    </p:spTree>
+  </p:cSld>
+  <p:clrMapOvr>
+    <a:masterClrMapping/>
+  </p:clrMapOvr>
+</p:sld>
+</file>
+
+<file path=ppt/slides/slide7.xml><?xml version="1.0" encoding="utf-8"?>
+<p:sld xmlns:a="http://schemas.openxmlformats.org/drawingml/2006/main" xmlns:p="http://schemas.openxmlformats.org/presentationml/2006/main" xmlns:r="http://schemas.openxmlformats.org/officeDocument/2006/relationships">
+  <p:cSld>
+    <p:spTree>
+      <p:nvGrpSpPr>
+        <p:cNvPr id="1" name=""/>
+        <p:cNvGrpSpPr/>
+        <p:nvPr/>
+      </p:nvGrpSpPr>
+      <p:grpSpPr>
+        <a:xfrm>
+          <a:off x="0" y="0"/>
+          <a:ext cx="0" cy="0"/>
+          <a:chOff x="0" y="0"/>
+          <a:chExt cx="0" cy="0"/>
+        </a:xfrm>
+      </p:grpSpPr>
+      <p:sp>
+        <p:nvSpPr>
+          <p:cNvPr id="2" name="bg"/>
+          <p:cNvSpPr/>
+          <p:nvPr/>
+        </p:nvSpPr>
+        <p:spPr>
+          <a:xfrm>
+            <a:off x="0" y="0"/>
+            <a:ext cx="12192000" cy="6858000"/>
+          </a:xfrm>
+          <a:prstGeom prst="rect">
+            <a:avLst/>
+          </a:prstGeom>
+          <a:gradFill flip="none" rotWithShape="1">
+            <a:gsLst>
+              <a:gs pos="0">
+                <a:srgbClr val="163A5F"/>
+              </a:gs>
+              <a:gs pos="100000">
+                <a:srgbClr val="2E7DD1"/>
+              </a:gs>
+            </a:gsLst>
+            <a:lin ang="2700000" scaled="1"/>
+          </a:gradFill>
+          <a:ln>
+            <a:noFill/>
+          </a:ln>
+        </p:spPr>
+        <p:txBody>
+          <a:bodyPr wrap="square" anchor="t">
+            <a:normAutofit/>
+          </a:bodyPr>
+          <a:lstStyle/>
+          <a:p>
+            <a:endParaRPr lang="en-US"/>
+          </a:p>
+        </p:txBody>
+      </p:sp>
+      <p:sp>
+        <p:nvSpPr>
+          <p:cNvPr id="3" name="section_no"/>
+          <p:cNvSpPr/>
+          <p:nvPr/>
+        </p:nvSpPr>
+        <p:spPr>
+          <a:xfrm>
+            <a:off x="830000" y="2340000"/>
+            <a:ext cx="10532000" cy="400000"/>
+          </a:xfrm>
+          <a:prstGeom prst="rect">
+            <a:avLst/>
+          </a:prstGeom>
+          <a:noFill/>
+          <a:ln>
+            <a:noFill/>
+          </a:ln>
+        </p:spPr>
+        <p:txBody>
+          <a:bodyPr wrap="square" anchor="t">
+            <a:normAutofit/>
+          </a:bodyPr>
+          <a:lstStyle/>
+          <a:p>
+            <a:pPr marL="0" indent="0" lvl="0">
+              <a:buNone/>
+            </a:pPr>
+            <a:r>
+              <a:rPr lang="en-US" sz="1300" b="1" spc="300" dirty="0">
+                <a:solidFill>
+                  <a:srgbClr val="C9A227"/>
+                </a:solidFill>
+                <a:latin typeface="Arial"/>
+                <a:cs typeface="Arial"/>
+              </a:rPr>
+              <a:t>01</a:t>
+            </a:r>
+          </a:p>
+        </p:txBody>
+      </p:sp>
+      <p:sp>
+        <p:nvSpPr>
+          <p:cNvPr id="4" name="title"/>
+          <p:cNvSpPr/>
+          <p:nvPr/>
+        </p:nvSpPr>
+        <p:spPr>
+          <a:xfrm>
+            <a:off x="830000" y="3030000"/>
+            <a:ext cx="10532000" cy="1500000"/>
+          </a:xfrm>
+          <a:prstGeom prst="rect">
+            <a:avLst/>
+          </a:prstGeom>
+          <a:noFill/>
+          <a:ln>
+            <a:noFill/>
+          </a:ln>
+        </p:spPr>
+        <p:txBody>
+          <a:bodyPr wrap="square" anchor="t">
+            <a:normAutofit/>
+          </a:bodyPr>
+          <a:lstStyle/>
+          <a:p>
+            <a:pPr marL="0" indent="0" lvl="0">
+              <a:lnSpc>
+                <a:spcPct val="105000"/>
+              </a:lnSpc>
+              <a:buNone/>
+            </a:pPr>
+            <a:r>
+              <a:rPr lang="en-US" sz="4000" b="1" dirty="0">
+                <a:solidFill>
+                  <a:srgbClr val="FFFFFF"/>
+                </a:solidFill>
+                <a:latin typeface="Arial"/>
+                <a:cs typeface="Arial"/>
+              </a:rPr>
+              <a:t>Chapter title in a few words</a:t>
+            </a:r>
+          </a:p>
+        </p:txBody>
+      </p:sp>
+    </p:spTree>
+  </p:cSld>
+  <p:clrMapOvr>
+    <a:masterClrMapping/>
+  </p:clrMapOvr>
+</p:sld>
+</file>
+
+<file path=ppt/slides/slide8.xml><?xml version="1.0" encoding="utf-8"?>
+<p:sld xmlns:a="http://schemas.openxmlformats.org/drawingml/2006/main" xmlns:p="http://schemas.openxmlformats.org/presentationml/2006/main" xmlns:r="http://schemas.openxmlformats.org/officeDocument/2006/relationships">
+  <p:cSld>
+    <p:spTree>
+      <p:nvGrpSpPr>
+        <p:cNvPr id="1" name=""/>
+        <p:cNvGrpSpPr/>
+        <p:nvPr/>
+      </p:nvGrpSpPr>
+      <p:grpSpPr>
+        <a:xfrm>
+          <a:off x="0" y="0"/>
+          <a:ext cx="0" cy="0"/>
+          <a:chOff x="0" y="0"/>
+          <a:chExt cx="0" cy="0"/>
+        </a:xfrm>
+      </p:grpSpPr>
+      <p:sp>
+        <p:nvSpPr>
+          <p:cNvPr id="2" name="kicker"/>
+          <p:cNvSpPr/>
+          <p:nvPr/>
+        </p:nvSpPr>
+        <p:spPr>
+          <a:xfrm>
+            <a:off x="830000" y="530000"/>
+            <a:ext cx="10532000" cy="360000"/>
+          </a:xfrm>
+          <a:prstGeom prst="rect">
+            <a:avLst/>
+          </a:prstGeom>
+          <a:noFill/>
+          <a:ln>
+            <a:noFill/>
+          </a:ln>
+        </p:spPr>
+        <p:txBody>
+          <a:bodyPr wrap="square" anchor="t">
+            <a:normAutofit/>
+          </a:bodyPr>
+          <a:lstStyle/>
+          <a:p>
+            <a:pPr marL="0" indent="0" lvl="0">
+              <a:buNone/>
+            </a:pPr>
+            <a:r>
+              <a:rPr lang="en-US" sz="1300" b="1" spc="300" dirty="0">
+                <a:solidFill>
+                  <a:srgbClr val="C9A227"/>
+                </a:solidFill>
+                <a:latin typeface="Arial"/>
+                <a:cs typeface="Arial"/>
+              </a:rPr>
+              <a:t>EXECUTIVE SUMMARY</a:t>
+            </a:r>
+          </a:p>
+        </p:txBody>
+      </p:sp>
+      <p:sp>
+        <p:nvSpPr>
+          <p:cNvPr id="3" name="title"/>
+          <p:cNvSpPr/>
+          <p:nvPr/>
+        </p:nvSpPr>
+        <p:spPr>
+          <a:xfrm>
+            <a:off x="830000" y="940000"/>
+            <a:ext cx="10532000" cy="1150000"/>
+          </a:xfrm>
+          <a:prstGeom prst="rect">
+            <a:avLst/>
+          </a:prstGeom>
+          <a:noFill/>
+          <a:ln>
+            <a:noFill/>
+          </a:ln>
+        </p:spPr>
+        <p:txBody>
+          <a:bodyPr wrap="square" anchor="t">
+            <a:normAutofit/>
+          </a:bodyPr>
+          <a:lstStyle/>
+          <a:p>
+            <a:pPr marL="0" indent="0" lvl="0">
+              <a:lnSpc>
+                <a:spcPct val="105000"/>
+              </a:lnSpc>
+              <a:buNone/>
+            </a:pPr>
+            <a:r>
+              <a:rPr lang="en-US" sz="2800" b="1" dirty="0">
+                <a:solidFill>
+                  <a:srgbClr val="163A5F"/>
+                </a:solidFill>
+                <a:latin typeface="Arial"/>
+                <a:cs typeface="Arial"/>
+              </a:rPr>
+              <a:t>The recommendation, the reasons, the ask</a:t>
+            </a:r>
+          </a:p>
+        </p:txBody>
+      </p:sp>
+      <p:sp>
+        <p:nvSpPr>
+          <p:cNvPr id="4" name="rule"/>
+          <p:cNvSpPr/>
+          <p:nvPr/>
+        </p:nvSpPr>
+        <p:spPr>
+          <a:xfrm>
+            <a:off x="830000" y="2170000"/>
+            <a:ext cx="10532000" cy="25400"/>
+          </a:xfrm>
+          <a:prstGeom prst="rect">
+            <a:avLst/>
+          </a:prstGeom>
+          <a:solidFill>
+            <a:srgbClr val="E3E7EE"/>
+          </a:solidFill>
+          <a:ln>
+            <a:noFill/>
+          </a:ln>
+        </p:spPr>
+        <p:txBody>
+          <a:bodyPr wrap="square" anchor="t">
+            <a:normAutofit/>
+          </a:bodyPr>
+          <a:lstStyle/>
+          <a:p>
+            <a:endParaRPr lang="en-US"/>
+          </a:p>
+        </p:txBody>
+      </p:sp>
+      <p:sp>
+        <p:nvSpPr>
+          <p:cNvPr id="5" name="col1_card"/>
+          <p:cNvSpPr/>
+          <p:nvPr/>
+        </p:nvSpPr>
+        <p:spPr>
+          <a:xfrm>
+            <a:off x="830000" y="2400000"/>
+            <a:ext cx="3310000" cy="3600000"/>
+          </a:xfrm>
+          <a:prstGeom prst="roundRect">
+            <a:avLst>
+              <a:gd name="adj" fmla="val 6000"/>
+            </a:avLst>
+          </a:prstGeom>
+          <a:solidFill>
+            <a:srgbClr val="FFFFFF"/>
+          </a:solidFill>
+          <a:ln>
+            <a:noFill/>
+          </a:ln>
+          <a:effectLst>
+            <a:outerShdw blurRad="190500" dist="76200" dir="5400000" rotWithShape="0">
+              <a:srgbClr val="0F1B2A">
+                <a:alpha val="25000"/>
+              </a:srgbClr>
+            </a:outerShdw>
+          </a:effectLst>
+        </p:spPr>
+        <p:txBody>
+          <a:bodyPr wrap="square" anchor="t">
+            <a:normAutofit/>
+          </a:bodyPr>
+          <a:lstStyle/>
+          <a:p>
+            <a:endParaRPr lang="en-US"/>
+          </a:p>
+        </p:txBody>
+      </p:sp>
+      <p:sp>
+        <p:nvSpPr>
+          <p:cNvPr id="6" name="col2_card"/>
+          <p:cNvSpPr/>
+          <p:nvPr/>
+        </p:nvSpPr>
+        <p:spPr>
+          <a:xfrm>
+            <a:off x="4441000" y="2400000"/>
+            <a:ext cx="3310000" cy="3600000"/>
+          </a:xfrm>
+          <a:prstGeom prst="roundRect">
+            <a:avLst>
+              <a:gd name="adj" fmla="val 6000"/>
+            </a:avLst>
+          </a:prstGeom>
+          <a:solidFill>
+            <a:srgbClr val="FFFFFF"/>
+          </a:solidFill>
+          <a:ln>
+            <a:noFill/>
+          </a:ln>
+          <a:effectLst>
+            <a:outerShdw blurRad="190500" dist="76200" dir="5400000" rotWithShape="0">
+              <a:srgbClr val="0F1B2A">
+                <a:alpha val="25000"/>
+              </a:srgbClr>
+            </a:outerShdw>
+          </a:effectLst>
+        </p:spPr>
+        <p:txBody>
+          <a:bodyPr wrap="square" anchor="t">
+            <a:normAutofit/>
+          </a:bodyPr>
+          <a:lstStyle/>
+          <a:p>
+            <a:endParaRPr lang="en-US"/>
+          </a:p>
+        </p:txBody>
+      </p:sp>
+      <p:sp>
+        <p:nvSpPr>
+          <p:cNvPr id="7" name="col3_card"/>
+          <p:cNvSpPr/>
+          <p:nvPr/>
+        </p:nvSpPr>
+        <p:spPr>
+          <a:xfrm>
+            <a:off x="8052000" y="2400000"/>
+            <a:ext cx="3310000" cy="3600000"/>
+          </a:xfrm>
+          <a:prstGeom prst="roundRect">
+            <a:avLst>
+              <a:gd name="adj" fmla="val 6000"/>
+            </a:avLst>
+          </a:prstGeom>
+          <a:solidFill>
+            <a:srgbClr val="FFFFFF"/>
+          </a:solidFill>
+          <a:ln>
+            <a:noFill/>
+          </a:ln>
+          <a:effectLst>
+            <a:outerShdw blurRad="190500" dist="76200" dir="5400000" rotWithShape="0">
+              <a:srgbClr val="0F1B2A">
+                <a:alpha val="25000"/>
+              </a:srgbClr>
+            </a:outerShdw>
+          </a:effectLst>
+        </p:spPr>
+        <p:txBody>
+          <a:bodyPr wrap="square" anchor="t">
+            <a:normAutofit/>
+          </a:bodyPr>
+          <a:lstStyle/>
+          <a:p>
+            <a:endParaRPr lang="en-US"/>
+          </a:p>
+        </p:txBody>
+      </p:sp>
+      <p:sp>
+        <p:nvSpPr>
+          <p:cNvPr id="8" name="col1_head"/>
+          <p:cNvSpPr/>
+          <p:nvPr/>
+        </p:nvSpPr>
+        <p:spPr>
+          <a:xfrm>
+            <a:off x="1080000" y="2650000"/>
+            <a:ext cx="2810000" cy="500000"/>
+          </a:xfrm>
+          <a:prstGeom prst="rect">
+            <a:avLst/>
+          </a:prstGeom>
+          <a:noFill/>
+          <a:ln>
+            <a:noFill/>
+          </a:ln>
+        </p:spPr>
+        <p:txBody>
+          <a:bodyPr wrap="square" anchor="t">
+            <a:normAutofit/>
+          </a:bodyPr>
+          <a:lstStyle/>
+          <a:p>
+            <a:pPr marL="0" indent="0" lvl="0">
+              <a:buNone/>
+            </a:pPr>
+            <a:r>
+              <a:rPr lang="en-US" sz="1800" b="1" dirty="0">
+                <a:solidFill>
+                  <a:srgbClr val="C9A227"/>
+                </a:solidFill>
+                <a:latin typeface="Arial"/>
+                <a:cs typeface="Arial"/>
+              </a:rPr>
+              <a:t>Situation</a:t>
+            </a:r>
+          </a:p>
+        </p:txBody>
+      </p:sp>
+      <p:sp>
+        <p:nvSpPr>
+          <p:cNvPr id="9" name="col2_head"/>
+          <p:cNvSpPr/>
+          <p:nvPr/>
+        </p:nvSpPr>
+        <p:spPr>
+          <a:xfrm>
+            <a:off x="4691000" y="2650000"/>
+            <a:ext cx="2810000" cy="500000"/>
+          </a:xfrm>
+          <a:prstGeom prst="rect">
+            <a:avLst/>
+          </a:prstGeom>
+          <a:noFill/>
+          <a:ln>
+            <a:noFill/>
+          </a:ln>
+        </p:spPr>
+        <p:txBody>
+          <a:bodyPr wrap="square" anchor="t">
+            <a:normAutofit/>
+          </a:bodyPr>
+          <a:lstStyle/>
+          <a:p>
+            <a:pPr marL="0" indent="0" lvl="0">
+              <a:buNone/>
+            </a:pPr>
+            <a:r>
+              <a:rPr lang="en-US" sz="1800" b="1" dirty="0">
+                <a:solidFill>
+                  <a:srgbClr val="C9A227"/>
+                </a:solidFill>
+                <a:latin typeface="Arial"/>
+                <a:cs typeface="Arial"/>
+              </a:rPr>
+              <a:t>Findings</a:t>
+            </a:r>
+          </a:p>
+        </p:txBody>
+      </p:sp>
+      <p:sp>
+        <p:nvSpPr>
+          <p:cNvPr id="10" name="col3_head"/>
+          <p:cNvSpPr/>
+          <p:nvPr/>
+        </p:nvSpPr>
+        <p:spPr>
+          <a:xfrm>
+            <a:off x="8302000" y="2650000"/>
+            <a:ext cx="2810000" cy="500000"/>
+          </a:xfrm>
+          <a:prstGeom prst="rect">
+            <a:avLst/>
+          </a:prstGeom>
+          <a:noFill/>
+          <a:ln>
+            <a:noFill/>
+          </a:ln>
+        </p:spPr>
+        <p:txBody>
+          <a:bodyPr wrap="square" anchor="t">
+            <a:normAutofit/>
+          </a:bodyPr>
+          <a:lstStyle/>
+          <a:p>
+            <a:pPr marL="0" indent="0" lvl="0">
+              <a:buNone/>
+            </a:pPr>
+            <a:r>
+              <a:rPr lang="en-US" sz="1800" b="1" dirty="0">
+                <a:solidFill>
+                  <a:srgbClr val="C9A227"/>
+                </a:solidFill>
+                <a:latin typeface="Arial"/>
+                <a:cs typeface="Arial"/>
+              </a:rPr>
+              <a:t>Recommendation</a:t>
+            </a:r>
+          </a:p>
+        </p:txBody>
+      </p:sp>
+      <p:sp>
+        <p:nvSpPr>
+          <p:cNvPr id="11" name="col1_body"/>
+          <p:cNvSpPr/>
+          <p:nvPr/>
+        </p:nvSpPr>
+        <p:spPr>
+          <a:xfrm>
+            <a:off x="1080000" y="3250000"/>
+            <a:ext cx="2810000" cy="2600000"/>
+          </a:xfrm>
+          <a:prstGeom prst="rect">
+            <a:avLst/>
+          </a:prstGeom>
+          <a:noFill/>
+          <a:ln>
+            <a:noFill/>
+          </a:ln>
+        </p:spPr>
+        <p:txBody>
+          <a:bodyPr wrap="square" anchor="t">
+            <a:normAutofit/>
+          </a:bodyPr>
+          <a:lstStyle/>
+          <a:p>
+            <a:pPr marL="0" indent="0" lvl="0">
+              <a:lnSpc>
+                <a:spcPct val="115000"/>
+              </a:lnSpc>
+              <a:spcBef>
+                <a:spcPts val="600"/>
+              </a:spcBef>
+              <a:buNone/>
+            </a:pPr>
+            <a:r>
+              <a:rPr lang="en-US" sz="1800" dirty="0">
+                <a:solidFill>
+                  <a:srgbClr val="20242C"/>
+                </a:solidFill>
+                <a:latin typeface="Arial"/>
+                <a:cs typeface="Arial"/>
+              </a:rPr>
+              <a:t>Up to five short lines</a:t>
+            </a:r>
+          </a:p>
+        </p:txBody>
+      </p:sp>
+      <p:sp>
+        <p:nvSpPr>
+          <p:cNvPr id="12" name="col2_body"/>
+          <p:cNvSpPr/>
+          <p:nvPr/>
+        </p:nvSpPr>
+        <p:spPr>
+          <a:xfrm>
+            <a:off x="4691000" y="3250000"/>
+            <a:ext cx="2810000" cy="2600000"/>
+          </a:xfrm>
+          <a:prstGeom prst="rect">
+            <a:avLst/>
+          </a:prstGeom>
+          <a:noFill/>
+          <a:ln>
+            <a:noFill/>
+          </a:ln>
+        </p:spPr>
+        <p:txBody>
+          <a:bodyPr wrap="square" anchor="t">
+            <a:normAutofit/>
+          </a:bodyPr>
+          <a:lstStyle/>
+          <a:p>
+            <a:pPr marL="0" indent="0" lvl="0">
+              <a:lnSpc>
+                <a:spcPct val="115000"/>
+              </a:lnSpc>
+              <a:spcBef>
+                <a:spcPts val="600"/>
+              </a:spcBef>
+              <a:buNone/>
+            </a:pPr>
+            <a:r>
+              <a:rPr lang="en-US" sz="1800" dirty="0">
+                <a:solidFill>
+                  <a:srgbClr val="20242C"/>
+                </a:solidFill>
+                <a:latin typeface="Arial"/>
+                <a:cs typeface="Arial"/>
+              </a:rPr>
+              <a:t>Up to five short lines</a:t>
+            </a:r>
+          </a:p>
+        </p:txBody>
+      </p:sp>
+      <p:sp>
+        <p:nvSpPr>
+          <p:cNvPr id="13" name="col3_body"/>
+          <p:cNvSpPr/>
+          <p:nvPr/>
+        </p:nvSpPr>
+        <p:spPr>
+          <a:xfrm>
+            <a:off x="8302000" y="3250000"/>
+            <a:ext cx="2810000" cy="2600000"/>
+          </a:xfrm>
+          <a:prstGeom prst="rect">
+            <a:avLst/>
+          </a:prstGeom>
+          <a:noFill/>
+          <a:ln>
+            <a:noFill/>
+          </a:ln>
+        </p:spPr>
+        <p:txBody>
+          <a:bodyPr wrap="square" anchor="t">
+            <a:normAutofit/>
+          </a:bodyPr>
+          <a:lstStyle/>
+          <a:p>
+            <a:pPr marL="0" indent="0" lvl="0">
+              <a:lnSpc>
+                <a:spcPct val="115000"/>
+              </a:lnSpc>
+              <a:spcBef>
+                <a:spcPts val="600"/>
+              </a:spcBef>
+              <a:buNone/>
+            </a:pPr>
+            <a:r>
+              <a:rPr lang="en-US" sz="1800" dirty="0">
+                <a:solidFill>
+                  <a:srgbClr val="20242C"/>
+                </a:solidFill>
+                <a:latin typeface="Arial"/>
+                <a:cs typeface="Arial"/>
+              </a:rPr>
+              <a:t>Up to five short lines</a:t>
+            </a:r>
+          </a:p>
+        </p:txBody>
+      </p:sp>
+      <p:sp>
+        <p:nvSpPr>
+          <p:cNvPr id="14" name="footer"/>
+          <p:cNvSpPr/>
+          <p:nvPr/>
+        </p:nvSpPr>
+        <p:spPr>
+          <a:xfrm>
+            <a:off x="830000" y="6350000"/>
+            <a:ext cx="10532000" cy="330000"/>
+          </a:xfrm>
+          <a:prstGeom prst="rect">
+            <a:avLst/>
+          </a:prstGeom>
+          <a:noFill/>
+          <a:ln>
+            <a:noFill/>
+          </a:ln>
+        </p:spPr>
+        <p:txBody>
+          <a:bodyPr wrap="square" anchor="t">
+            <a:normAutofit/>
+          </a:bodyPr>
+          <a:lstStyle/>
+          <a:p>
+            <a:pPr marL="0" indent="0" lvl="0">
+              <a:buNone/>
+            </a:pPr>
+            <a:r>
+              <a:rPr lang="en-US" sz="1100" dirty="0">
+                <a:solidFill>
+                  <a:srgbClr val="6B7280"/>
+                </a:solidFill>
+                <a:latin typeface="Arial"/>
+                <a:cs typeface="Arial"/>
+              </a:rPr>
+              <a:t>Deck title · 1</a:t>
+            </a:r>
+          </a:p>
+        </p:txBody>
+      </p:sp>
+    </p:spTree>
+  </p:cSld>
+  <p:clrMapOvr>
+    <a:masterClrMapping/>
+  </p:clrMapOvr>
+</p:sld>
+</file>
+
+<file path=ppt/slides/slide9.xml><?xml version="1.0" encoding="utf-8"?>
+<p:sld xmlns:a="http://schemas.openxmlformats.org/drawingml/2006/main" xmlns:p="http://schemas.openxmlformats.org/presentationml/2006/main" xmlns:r="http://schemas.openxmlformats.org/officeDocument/2006/relationships">
+  <p:cSld>
+    <p:spTree>
+      <p:nvGrpSpPr>
+        <p:cNvPr id="1" name=""/>
+        <p:cNvGrpSpPr/>
+        <p:nvPr/>
+      </p:nvGrpSpPr>
+      <p:grpSpPr>
+        <a:xfrm>
+          <a:off x="0" y="0"/>
+          <a:ext cx="0" cy="0"/>
+          <a:chOff x="0" y="0"/>
+          <a:chExt cx="0" cy="0"/>
+        </a:xfrm>
+      </p:grpSpPr>
+      <p:sp>
+        <p:nvSpPr>
+          <p:cNvPr id="2" name="kicker"/>
+          <p:cNvSpPr/>
+          <p:nvPr/>
+        </p:nvSpPr>
+        <p:spPr>
+          <a:xfrm>
+            <a:off x="830000" y="530000"/>
+            <a:ext cx="10532000" cy="360000"/>
+          </a:xfrm>
+          <a:prstGeom prst="rect">
+            <a:avLst/>
+          </a:prstGeom>
+          <a:noFill/>
+          <a:ln>
+            <a:noFill/>
+          </a:ln>
+        </p:spPr>
+        <p:txBody>
+          <a:bodyPr wrap="square" anchor="t">
+            <a:normAutofit/>
+          </a:bodyPr>
+          <a:lstStyle/>
+          <a:p>
+            <a:pPr marL="0" indent="0" lvl="0">
+              <a:buNone/>
+            </a:pPr>
+            <a:r>
+              <a:rPr lang="en-US" sz="1300" b="1" spc="300" dirty="0">
+                <a:solidFill>
+                  <a:srgbClr val="C9A227"/>
+                </a:solidFill>
+                <a:latin typeface="Arial"/>
+                <a:cs typeface="Arial"/>
+              </a:rPr>
+              <a:t>THE NUMBER</a:t>
+            </a:r>
+          </a:p>
+        </p:txBody>
+      </p:sp>
+      <p:sp>
+        <p:nvSpPr>
+          <p:cNvPr id="3" name="metric"/>
+          <p:cNvSpPr/>
+          <p:nvPr/>
+        </p:nvSpPr>
+        <p:spPr>
+          <a:xfrm>
+            <a:off x="830000" y="2050000"/>
+            <a:ext cx="10532000" cy="2300000"/>
+          </a:xfrm>
+          <a:prstGeom prst="rect">
+            <a:avLst/>
+          </a:prstGeom>
+          <a:noFill/>
+          <a:ln>
+            <a:noFill/>
+          </a:ln>
+        </p:spPr>
+        <p:txBody>
+          <a:bodyPr wrap="square" anchor="ctr">
+            <a:normAutofit/>
+          </a:bodyPr>
+          <a:lstStyle/>
+          <a:p>
+            <a:pPr marL="0" indent="0" lvl="0" algn="ctr">
+              <a:buNone/>
+            </a:pPr>
+            <a:r>
+              <a:rPr lang="en-US" sz="12000" b="1" dirty="0">
+                <a:solidFill>
+                  <a:srgbClr val="163A5F"/>
+                </a:solidFill>
+                <a:latin typeface="Arial"/>
+                <a:cs typeface="Arial"/>
+              </a:rPr>
+              <a:t>34,000</a:t>
+            </a:r>
+          </a:p>
+        </p:txBody>
+      </p:sp>
+      <p:sp>
+        <p:nvSpPr>
+          <p:cNvPr id="4" name="context"/>
+          <p:cNvSpPr/>
+          <p:nvPr/>
+        </p:nvSpPr>
+        <p:spPr>
+          <a:xfrm>
+            <a:off x="830000" y="4500000"/>
+            <a:ext cx="10532000" cy="800000"/>
+          </a:xfrm>
+          <a:prstGeom prst="rect">
+            <a:avLst/>
+          </a:prstGeom>
+          <a:noFill/>
+          <a:ln>
+            <a:noFill/>
+          </a:ln>
+        </p:spPr>
+        <p:txBody>
+          <a:bodyPr wrap="square" anchor="t">
+            <a:normAutofit/>
+          </a:bodyPr>
+          <a:lstStyle/>
+          <a:p>
+            <a:pPr marL="0" indent="0" lvl="0" algn="ctr">
+              <a:buNone/>
+            </a:pPr>
+            <a:r>
+              <a:rPr lang="en-US" sz="2000" dirty="0">
+                <a:solidFill>
+                  <a:srgbClr val="6B7280"/>
+                </a:solidFill>
+                <a:latin typeface="Arial"/>
+                <a:cs typeface="Arial"/>
+              </a:rPr>
+              <a:t>A line that makes the number human</a:t>
+            </a:r>
+          </a:p>
+        </p:txBody>
+      </p:sp>
+      <p:sp>
+        <p:nvSpPr>
+          <p:cNvPr id="5" name="source"/>
+          <p:cNvSpPr/>
+          <p:nvPr/>
+        </p:nvSpPr>
+        <p:spPr>
+          <a:xfrm>
+            <a:off x="830000" y="5950000"/>
+            <a:ext cx="10532000" cy="300000"/>
+          </a:xfrm>
+          <a:prstGeom prst="rect">
+            <a:avLst/>
+          </a:prstGeom>
+          <a:noFill/>
+          <a:ln>
+            <a:noFill/>
+          </a:ln>
+        </p:spPr>
+        <p:txBody>
+          <a:bodyPr wrap="square" anchor="t">
+            <a:normAutofit/>
+          </a:bodyPr>
+          <a:lstStyle/>
+          <a:p>
+            <a:pPr marL="0" indent="0" lvl="0">
+              <a:buNone/>
+            </a:pPr>
+            <a:r>
+              <a:rPr lang="en-US" sz="1100" dirty="0">
+                <a:solidFill>
+                  <a:srgbClr val="6B7280"/>
+                </a:solidFill>
+                <a:latin typeface="Arial"/>
+                <a:cs typeface="Arial"/>
+              </a:rPr>
+              <a:t>Source: internal data (2026)</a:t>
             </a:r>
           </a:p>
         </p:txBody>
